--- a/freelance/samples/pptx/AI_in_Education_Opportunities_Risks.pptx
+++ b/freelance/samples/pptx/AI_in_Education_Opportunities_Risks.pptx
@@ -512,7 +512,7 @@
           <a:lstStyle/>
           <a:p>
             <a:r>
-              <a:t>Good morning panel and fellow students. Today we explore generative AI in higher education.</a:t>
+              <a:t>Welcome everyone. Today we analyze the profound impact of Artificial Intelligence in collegiate classrooms. Our objective is to evaluate how adaptive AI tutors accelerate mastery, while addressing critical ethical concerns regarding academic integrity and algorithmic bias.</a:t>
             </a:r>
           </a:p>
         </p:txBody>
@@ -582,7 +582,7 @@
           <a:lstStyle/>
           <a:p>
             <a:r>
-              <a:t>In conclusion, personal mastery must always precede automation in software and academic work.</a:t>
+              <a:t>In summary, students must treat AI as an intern whose work requires verification, while educators must evolve exam formats to prioritize real-time critical thinking.</a:t>
             </a:r>
           </a:p>
         </p:txBody>
@@ -652,7 +652,7 @@
           <a:lstStyle/>
           <a:p>
             <a:r>
-              <a:t>Thank you for your attention. I welcome questions from the panel.</a:t>
+              <a:t>Thank you for your attention. The future of education belongs to those who master collaborative intelligence — pairing human curiosity and ethics with artificial computing speed. I now welcome any questions.</a:t>
             </a:r>
           </a:p>
         </p:txBody>
@@ -722,7 +722,7 @@
           <a:lstStyle/>
           <a:p>
             <a:r>
-              <a:t>Here is our presentation agenda covering history, productivity, risks, and campus guidelines.</a:t>
+              <a:t>As shown on the screen, AI adoption among students is unprecedented. Over three-quarters of college students actively use AI assistance. Faculty must therefore redesign assessments to evaluate critical synthesis rather than simple regurgitation.</a:t>
             </a:r>
           </a:p>
         </p:txBody>
@@ -792,7 +792,7 @@
           <a:lstStyle/>
           <a:p>
             <a:r>
-              <a:t>Our core thesis is that AI empowers disciplined minds but cannot replace human judgment.</a:t>
+              <a:t>Moving to our first major pillar: Intelligent Tutoring Systems. Rather than passive textbook reading, students can now interact with conversational AI agents that adapt dynamically to their specific learning pace.</a:t>
             </a:r>
           </a:p>
         </p:txBody>
@@ -862,7 +862,7 @@
           <a:lstStyle/>
           <a:p>
             <a:r>
-              <a:t>Let us explore how rapid technological shifts have restructured university classrooms.</a:t>
+              <a:t>Adaptive feedback provides immediate diagnostic explanations. When a student struggles with a programming concept like recursion, the tutor generates tailored analogies until cognitive comprehension is achieved.</a:t>
             </a:r>
           </a:p>
         </p:txBody>
@@ -932,7 +932,7 @@
           <a:lstStyle/>
           <a:p>
             <a:r>
-              <a:t>These empirical metrics demonstrate how pervasive AI tools have become across college departments.</a:t>
+              <a:t>These three core levers demonstrate that AI serves to augment, not displace, human educators. By handling administrative grading, professors can dedicate more office hours to deep student mentorship.</a:t>
             </a:r>
           </a:p>
         </p:txBody>
@@ -1002,7 +1002,7 @@
           <a:lstStyle/>
           <a:p>
             <a:r>
-              <a:t>These three pillars highlight where AI provides immense value in technical education.</a:t>
+              <a:t>We must address the dark side: cognitive atrophy. If students allow AI to solve every homework problem, critical thinking muscles wither. Furthermore, AI models frequently invent completely fictitious citations with total confidence.</a:t>
             </a:r>
           </a:p>
         </p:txBody>
@@ -1072,7 +1072,7 @@
           <a:lstStyle/>
           <a:p>
             <a:r>
-              <a:t>Here we contrast responsible cognitive augmentation against intellectual surrender.</a:t>
+              <a:t>To address these vulnerabilities, academic institutions cannot simply ban AI tools. Blanket bans fail. Instead, colleges must deploy transparent usage frameworks.</a:t>
             </a:r>
           </a:p>
         </p:txBody>
@@ -1142,7 +1142,7 @@
           <a:lstStyle/>
           <a:p>
             <a:r>
-              <a:t>Part Two focuses on verifiable protocols for students and institutions.</a:t>
+              <a:t>The most effective policy is mandatory disclosure. When students must document their AI prompts and submit a reflective synthesis of what they changed, academic honesty is maintained while technical literacy grows.</a:t>
             </a:r>
           </a:p>
         </p:txBody>
@@ -1212,7 +1212,7 @@
           <a:lstStyle/>
           <a:p>
             <a:r>
-              <a:t>This four-step research protocol ensures academic transparency and factual integrity.</a:t>
+              <a:t>Here is our 3-tier governance rubric. Clearly articulating what constitutes permitted brainstorming versus prohibited plagiarism removes ambiguity for both instructors and learners.</a:t>
             </a:r>
           </a:p>
         </p:txBody>
@@ -4209,7 +4209,7 @@
 </file>
 
 <file path=ppt/slides/slide1.xml><?xml version="1.0" encoding="utf-8"?>
-<p:sld xmlns:a="http://schemas.openxmlformats.org/drawingml/2006/main" xmlns:p="http://schemas.openxmlformats.org/presentationml/2006/main" xmlns:r="http://schemas.openxmlformats.org/officeDocument/2006/relationships">
+<p:sld xmlns:p14="http://schemas.microsoft.com/office/powerpoint/2010/main" xmlns:a="http://schemas.openxmlformats.org/drawingml/2006/main" xmlns:p="http://schemas.openxmlformats.org/presentationml/2006/main" xmlns:r="http://schemas.openxmlformats.org/officeDocument/2006/relationships">
   <p:cSld>
     <p:spTree>
       <p:nvGrpSpPr>
@@ -4261,68 +4261,40 @@
           </a:p>
         </p:txBody>
       </p:sp>
-      <p:sp>
-        <p:nvSpPr>
-          <p:cNvPr id="3" name="Rounded Rectangle 2"/>
-          <p:cNvSpPr/>
+      <p:pic>
+        <p:nvPicPr>
+          <p:cNvPr id="3" name="!!Hero_Image" descr="ai_hero.png"/>
+          <p:cNvPicPr>
+            <a:picLocks noChangeAspect="1"/>
+          </p:cNvPicPr>
           <p:nvPr/>
-        </p:nvSpPr>
-        <p:spPr>
-          <a:xfrm>
-            <a:off x="731520" y="1097280"/>
-            <a:ext cx="3474720" cy="411480"/>
-          </a:xfrm>
-          <a:prstGeom prst="roundRect">
+        </p:nvPicPr>
+        <p:blipFill>
+          <a:blip r:embed="rId2"/>
+          <a:stretch>
+            <a:fillRect/>
+          </a:stretch>
+        </p:blipFill>
+        <p:spPr>
+          <a:xfrm>
+            <a:off x="6217920" y="731520"/>
+            <a:ext cx="5303520" cy="5394960"/>
+          </a:xfrm>
+          <a:prstGeom prst="rect">
             <a:avLst/>
           </a:prstGeom>
-          <a:solidFill>
-            <a:srgbClr val="7C3AED"/>
-          </a:solidFill>
-          <a:ln>
-            <a:noFill/>
-          </a:ln>
-        </p:spPr>
-        <p:style>
-          <a:lnRef idx="1">
-            <a:schemeClr val="accent1"/>
-          </a:lnRef>
-          <a:fillRef idx="3">
-            <a:schemeClr val="accent1"/>
-          </a:fillRef>
-          <a:effectRef idx="2">
-            <a:schemeClr val="accent1"/>
-          </a:effectRef>
-          <a:fontRef idx="minor">
-            <a:schemeClr val="lt1"/>
-          </a:fontRef>
-        </p:style>
-        <p:txBody>
-          <a:bodyPr rtlCol="0" anchor="ctr"/>
-          <a:lstStyle/>
-          <a:p>
-            <a:pPr algn="ctr">
-              <a:defRPr sz="1000" b="1">
-                <a:solidFill>
-                  <a:srgbClr val="F8FAFC"/>
-                </a:solidFill>
-              </a:defRPr>
-            </a:pPr>
-            <a:r>
-              <a:t>ACADEMIC KEYNOTE PRESENTATION</a:t>
-            </a:r>
-          </a:p>
-        </p:txBody>
-      </p:sp>
-      <p:sp>
-        <p:nvSpPr>
-          <p:cNvPr id="4" name="TextBox 3"/>
+        </p:spPr>
+      </p:pic>
+      <p:sp>
+        <p:nvSpPr>
+          <p:cNvPr id="4" name="!!Title_Card"/>
           <p:cNvSpPr txBox="1"/>
           <p:nvPr/>
         </p:nvSpPr>
         <p:spPr>
           <a:xfrm>
-            <a:off x="731520" y="1828800"/>
-            <a:ext cx="10515600" cy="2011680"/>
+            <a:off x="731520" y="1463040"/>
+            <a:ext cx="5303520" cy="4114800"/>
           </a:xfrm>
           <a:prstGeom prst="rect">
             <a:avLst/>
@@ -4330,94 +4302,57 @@
           <a:noFill/>
         </p:spPr>
         <p:txBody>
-          <a:bodyPr wrap="none">
+          <a:bodyPr wrap="square">
             <a:spAutoFit/>
           </a:bodyPr>
           <a:lstStyle/>
           <a:p>
             <a:pPr>
-              <a:defRPr sz="4000" b="1">
-                <a:solidFill>
-                  <a:srgbClr val="F8FAFC"/>
+              <a:defRPr sz="1200" b="1">
+                <a:solidFill>
+                  <a:srgbClr val="00E5FF"/>
                 </a:solidFill>
               </a:defRPr>
             </a:pPr>
             <a:r>
+              <a:t>EDUCATIONAL TECHNOLOGY</a:t>
+            </a:r>
+          </a:p>
+          <a:p>
+            <a:pPr>
+              <a:defRPr sz="3600" b="1">
+                <a:solidFill>
+                  <a:srgbClr val="FFFFFF"/>
+                </a:solidFill>
+              </a:defRPr>
+            </a:pPr>
+            <a:r>
               <a:t>Artificial Intelligence in Education</a:t>
             </a:r>
           </a:p>
-        </p:txBody>
-      </p:sp>
-      <p:sp>
-        <p:nvSpPr>
-          <p:cNvPr id="5" name="TextBox 4"/>
-          <p:cNvSpPr txBox="1"/>
-          <p:nvPr/>
-        </p:nvSpPr>
-        <p:spPr>
-          <a:xfrm>
-            <a:off x="731520" y="3931920"/>
-            <a:ext cx="10515600" cy="914400"/>
-          </a:xfrm>
-          <a:prstGeom prst="rect">
-            <a:avLst/>
-          </a:prstGeom>
-          <a:noFill/>
-        </p:spPr>
-        <p:txBody>
-          <a:bodyPr wrap="none">
-            <a:spAutoFit/>
-          </a:bodyPr>
-          <a:lstStyle/>
           <a:p>
             <a:pPr>
-              <a:defRPr sz="2000">
-                <a:solidFill>
-                  <a:srgbClr val="22D3EE"/>
+              <a:defRPr sz="1500">
+                <a:solidFill>
+                  <a:srgbClr val="B4C8DC"/>
                 </a:solidFill>
               </a:defRPr>
             </a:pPr>
             <a:r>
-              <a:t>Navigating Academic Opportunities, Ethical Dilemmas, and the Future of Learning</a:t>
-            </a:r>
-          </a:p>
-        </p:txBody>
-      </p:sp>
-      <p:sp>
-        <p:nvSpPr>
-          <p:cNvPr id="6" name="TextBox 5"/>
-          <p:cNvSpPr txBox="1"/>
-          <p:nvPr/>
-        </p:nvSpPr>
-        <p:spPr>
-          <a:xfrm>
-            <a:off x="731520" y="5120640"/>
-            <a:ext cx="10515600" cy="914400"/>
-          </a:xfrm>
-          <a:prstGeom prst="rect">
-            <a:avLst/>
-          </a:prstGeom>
-          <a:noFill/>
-        </p:spPr>
-        <p:txBody>
-          <a:bodyPr wrap="none">
-            <a:spAutoFit/>
-          </a:bodyPr>
-          <a:lstStyle/>
-          <a:p>
+              <a:t>Opportunities, Ethical Risks, and Modern Pedagogies</a:t>
+            </a:r>
+          </a:p>
+          <a:p>
+            <a:br/>
             <a:pPr>
-              <a:defRPr sz="1400">
-                <a:solidFill>
-                  <a:srgbClr val="94A3B8"/>
+              <a:defRPr sz="1100">
+                <a:solidFill>
+                  <a:srgbClr val="8CA0B4"/>
                 </a:solidFill>
               </a:defRPr>
             </a:pPr>
             <a:r>
-              <a:t>Presented by: Jhon Paulo V. Gascon  •  BSIT 2G</a:t>
-            </a:r>
-            <a:br/>
-            <a:r>
-              <a:t>STI West Negros University  •  Academic Year 2026–2027</a:t>
+              <a:t>Presenter: Jhon Paulo Gascon • STI West Negros University</a:t>
             </a:r>
           </a:p>
         </p:txBody>
@@ -4427,14 +4362,14 @@
   <p:clrMapOvr>
     <a:masterClrMapping/>
   </p:clrMapOvr>
-  <p:transition spd="slow">
+  <p:transition spd="med">
     <p:fade/>
   </p:transition>
 </p:sld>
 </file>
 
 <file path=ppt/slides/slide10.xml><?xml version="1.0" encoding="utf-8"?>
-<p:sld xmlns:a="http://schemas.openxmlformats.org/drawingml/2006/main" xmlns:p="http://schemas.openxmlformats.org/presentationml/2006/main" xmlns:r="http://schemas.openxmlformats.org/officeDocument/2006/relationships">
+<p:sld xmlns:p14="http://schemas.microsoft.com/office/powerpoint/2010/main" xmlns:a="http://schemas.openxmlformats.org/drawingml/2006/main" xmlns:p="http://schemas.openxmlformats.org/presentationml/2006/main" xmlns:r="http://schemas.openxmlformats.org/officeDocument/2006/relationships">
   <p:cSld>
     <p:spTree>
       <p:nvGrpSpPr>
@@ -4494,8 +4429,8 @@
         </p:nvSpPr>
         <p:spPr>
           <a:xfrm>
-            <a:off x="731520" y="365760"/>
-            <a:ext cx="10058400" cy="365760"/>
+            <a:off x="731520" y="457200"/>
+            <a:ext cx="10698480" cy="1005840"/>
           </a:xfrm>
           <a:prstGeom prst="rect">
             <a:avLst/>
@@ -4503,7 +4438,7 @@
           <a:noFill/>
         </p:spPr>
         <p:txBody>
-          <a:bodyPr wrap="none">
+          <a:bodyPr wrap="square">
             <a:spAutoFit/>
           </a:bodyPr>
           <a:lstStyle/>
@@ -4511,106 +4446,48 @@
             <a:pPr>
               <a:defRPr sz="1100" b="1">
                 <a:solidFill>
-                  <a:srgbClr val="22D3EE"/>
+                  <a:srgbClr val="00E5FF"/>
                 </a:solidFill>
               </a:defRPr>
             </a:pPr>
             <a:r>
-              <a:t>FINAL INSIGHTS</a:t>
-            </a:r>
-          </a:p>
-        </p:txBody>
-      </p:sp>
-      <p:sp>
-        <p:nvSpPr>
-          <p:cNvPr id="4" name="TextBox 3"/>
-          <p:cNvSpPr txBox="1"/>
-          <p:nvPr/>
-        </p:nvSpPr>
-        <p:spPr>
-          <a:xfrm>
-            <a:off x="731520" y="685800"/>
-            <a:ext cx="10515600" cy="731520"/>
-          </a:xfrm>
-          <a:prstGeom prst="rect">
-            <a:avLst/>
-          </a:prstGeom>
-          <a:noFill/>
-        </p:spPr>
-        <p:txBody>
-          <a:bodyPr wrap="none">
-            <a:spAutoFit/>
-          </a:bodyPr>
-          <a:lstStyle/>
+              <a:t>STRATEGIC ROADMAP</a:t>
+            </a:r>
+          </a:p>
           <a:p>
             <a:pPr>
-              <a:defRPr sz="2600" b="1">
-                <a:solidFill>
-                  <a:srgbClr val="F8FAFC"/>
+              <a:defRPr sz="2400" b="1">
+                <a:solidFill>
+                  <a:srgbClr val="FFFFFF"/>
                 </a:solidFill>
               </a:defRPr>
             </a:pPr>
             <a:r>
-              <a:t>Summary &amp; Guiding Principles</a:t>
-            </a:r>
-          </a:p>
-        </p:txBody>
-      </p:sp>
-      <p:sp>
-        <p:nvSpPr>
-          <p:cNvPr id="5" name="TextBox 4"/>
-          <p:cNvSpPr txBox="1"/>
-          <p:nvPr/>
-        </p:nvSpPr>
-        <p:spPr>
-          <a:xfrm>
-            <a:off x="731520" y="6400800"/>
-            <a:ext cx="10728655" cy="320040"/>
-          </a:xfrm>
-          <a:prstGeom prst="rect">
-            <a:avLst/>
-          </a:prstGeom>
-          <a:noFill/>
-        </p:spPr>
-        <p:txBody>
-          <a:bodyPr wrap="none">
-            <a:spAutoFit/>
-          </a:bodyPr>
-          <a:lstStyle/>
-          <a:p>
-            <a:pPr>
-              <a:defRPr sz="900">
-                <a:solidFill>
-                  <a:srgbClr val="94A3B8"/>
-                </a:solidFill>
-              </a:defRPr>
-            </a:pPr>
-            <a:r>
-              <a:t>STI West Negros University  •  Jhon Paulo V. Gascon  •  Slide 10 of 11</a:t>
-            </a:r>
-          </a:p>
-        </p:txBody>
-      </p:sp>
-      <p:sp>
-        <p:nvSpPr>
-          <p:cNvPr id="6" name="Rounded Rectangle 5"/>
+              <a:t>Action Plan for Students &amp; Faculty</a:t>
+            </a:r>
+          </a:p>
+        </p:txBody>
+      </p:sp>
+      <p:sp>
+        <p:nvSpPr>
+          <p:cNvPr id="4" name="!!Card_1"/>
           <p:cNvSpPr/>
           <p:nvPr/>
         </p:nvSpPr>
         <p:spPr>
           <a:xfrm>
-            <a:off x="731520" y="1828800"/>
-            <a:ext cx="10728655" cy="1188720"/>
+            <a:off x="731520" y="1645920"/>
+            <a:ext cx="3291840" cy="4114800"/>
           </a:xfrm>
           <a:prstGeom prst="roundRect">
             <a:avLst/>
           </a:prstGeom>
           <a:solidFill>
-            <a:srgbClr val="131F37"/>
+            <a:srgbClr val="131D32"/>
           </a:solidFill>
           <a:ln w="19050">
             <a:solidFill>
-              <a:srgbClr val="22D3EE"/>
+              <a:srgbClr val="00E5FF"/>
             </a:solidFill>
           </a:ln>
         </p:spPr>
@@ -4629,83 +4506,54 @@
           </a:fontRef>
         </p:style>
         <p:txBody>
-          <a:bodyPr rtlCol="0" anchor="ctr"/>
-          <a:lstStyle/>
-          <a:p>
-            <a:pPr algn="ctr"/>
-          </a:p>
-        </p:txBody>
-      </p:sp>
-      <p:sp>
-        <p:nvSpPr>
-          <p:cNvPr id="7" name="TextBox 6"/>
-          <p:cNvSpPr txBox="1"/>
-          <p:nvPr/>
-        </p:nvSpPr>
-        <p:spPr>
-          <a:xfrm>
-            <a:off x="1005840" y="2011680"/>
-            <a:ext cx="10241280" cy="822960"/>
-          </a:xfrm>
-          <a:prstGeom prst="rect">
-            <a:avLst/>
-          </a:prstGeom>
-          <a:noFill/>
-        </p:spPr>
-        <p:txBody>
-          <a:bodyPr wrap="square">
-            <a:spAutoFit/>
-          </a:bodyPr>
-          <a:lstStyle/>
+          <a:bodyPr rtlCol="0" anchor="ctr" wrap="square"/>
+          <a:lstStyle/>
+          <a:p>
+            <a:pPr algn="ctr">
+              <a:defRPr b="1" sz="1500">
+                <a:solidFill>
+                  <a:srgbClr val="00E5FF"/>
+                </a:solidFill>
+              </a:defRPr>
+            </a:pPr>
+            <a:r>
+              <a:t>For Students</a:t>
+            </a:r>
+          </a:p>
           <a:p>
             <a:pPr>
-              <a:defRPr sz="1800" b="1">
-                <a:solidFill>
-                  <a:srgbClr val="22D3EE"/>
+              <a:defRPr sz="1100">
+                <a:solidFill>
+                  <a:srgbClr val="F0F0F0"/>
                 </a:solidFill>
               </a:defRPr>
             </a:pPr>
             <a:r>
-              <a:t>Mastery Precedes Automation</a:t>
-            </a:r>
-          </a:p>
-          <a:p>
-            <a:pPr>
-              <a:spcBef>
-                <a:spcPts val="300"/>
-              </a:spcBef>
-              <a:defRPr sz="1300">
-                <a:solidFill>
-                  <a:srgbClr val="F8FAFC"/>
-                </a:solidFill>
-              </a:defRPr>
-            </a:pPr>
-            <a:r>
-              <a:t>Never rely on AI to solve problems you cannot understand manually.</a:t>
-            </a:r>
-          </a:p>
-        </p:txBody>
-      </p:sp>
-      <p:sp>
-        <p:nvSpPr>
-          <p:cNvPr id="8" name="Rounded Rectangle 7"/>
+              <a:t>Treat AI as a junior research assistant. Always fact-check citations, verify logic, and defend every line of code.</a:t>
+            </a:r>
+          </a:p>
+        </p:txBody>
+      </p:sp>
+      <p:sp>
+        <p:nvSpPr>
+          <p:cNvPr id="5" name="!!Card_2"/>
           <p:cNvSpPr/>
           <p:nvPr/>
         </p:nvSpPr>
         <p:spPr>
           <a:xfrm>
-            <a:off x="731520" y="3200400"/>
-            <a:ext cx="10728655" cy="1188720"/>
+            <a:off x="4389120" y="1645920"/>
+            <a:ext cx="3291840" cy="4114800"/>
           </a:xfrm>
           <a:prstGeom prst="roundRect">
             <a:avLst/>
           </a:prstGeom>
           <a:solidFill>
-            <a:srgbClr val="131F37"/>
+            <a:srgbClr val="131D32"/>
           </a:solidFill>
           <a:ln w="19050">
             <a:solidFill>
-              <a:srgbClr val="22D3EE"/>
+              <a:srgbClr val="00E5FF"/>
             </a:solidFill>
           </a:ln>
         </p:spPr>
@@ -4724,83 +4572,54 @@
           </a:fontRef>
         </p:style>
         <p:txBody>
-          <a:bodyPr rtlCol="0" anchor="ctr"/>
-          <a:lstStyle/>
-          <a:p>
-            <a:pPr algn="ctr"/>
-          </a:p>
-        </p:txBody>
-      </p:sp>
-      <p:sp>
-        <p:nvSpPr>
-          <p:cNvPr id="9" name="TextBox 8"/>
-          <p:cNvSpPr txBox="1"/>
-          <p:nvPr/>
-        </p:nvSpPr>
-        <p:spPr>
-          <a:xfrm>
-            <a:off x="1005840" y="3383280"/>
-            <a:ext cx="10241280" cy="822960"/>
-          </a:xfrm>
-          <a:prstGeom prst="rect">
-            <a:avLst/>
-          </a:prstGeom>
-          <a:noFill/>
-        </p:spPr>
-        <p:txBody>
-          <a:bodyPr wrap="square">
-            <a:spAutoFit/>
-          </a:bodyPr>
-          <a:lstStyle/>
+          <a:bodyPr rtlCol="0" anchor="ctr" wrap="square"/>
+          <a:lstStyle/>
+          <a:p>
+            <a:pPr algn="ctr">
+              <a:defRPr b="1" sz="1500">
+                <a:solidFill>
+                  <a:srgbClr val="00E5FF"/>
+                </a:solidFill>
+              </a:defRPr>
+            </a:pPr>
+            <a:r>
+              <a:t>For Educators</a:t>
+            </a:r>
+          </a:p>
           <a:p>
             <a:pPr>
-              <a:defRPr sz="1800" b="1">
-                <a:solidFill>
-                  <a:srgbClr val="22D3EE"/>
+              <a:defRPr sz="1100">
+                <a:solidFill>
+                  <a:srgbClr val="F0F0F0"/>
                 </a:solidFill>
               </a:defRPr>
             </a:pPr>
             <a:r>
-              <a:t>Human Accountability</a:t>
-            </a:r>
-          </a:p>
-          <a:p>
-            <a:pPr>
-              <a:spcBef>
-                <a:spcPts val="300"/>
-              </a:spcBef>
-              <a:defRPr sz="1300">
-                <a:solidFill>
-                  <a:srgbClr val="F8FAFC"/>
-                </a:solidFill>
-              </a:defRPr>
-            </a:pPr>
-            <a:r>
-              <a:t>Authors bear 100% legal and moral responsibility for all published work.</a:t>
-            </a:r>
-          </a:p>
-        </p:txBody>
-      </p:sp>
-      <p:sp>
-        <p:nvSpPr>
-          <p:cNvPr id="10" name="Rounded Rectangle 9"/>
+              <a:t>Shift exam design to authentic case studies, practical problem solving, and contextual oral evaluations.</a:t>
+            </a:r>
+          </a:p>
+        </p:txBody>
+      </p:sp>
+      <p:sp>
+        <p:nvSpPr>
+          <p:cNvPr id="6" name="!!Card_3"/>
           <p:cNvSpPr/>
           <p:nvPr/>
         </p:nvSpPr>
         <p:spPr>
           <a:xfrm>
-            <a:off x="731520" y="4572000"/>
-            <a:ext cx="10728655" cy="1188720"/>
+            <a:off x="8046720" y="1645920"/>
+            <a:ext cx="3291840" cy="4114800"/>
           </a:xfrm>
           <a:prstGeom prst="roundRect">
             <a:avLst/>
           </a:prstGeom>
           <a:solidFill>
-            <a:srgbClr val="131F37"/>
+            <a:srgbClr val="131D32"/>
           </a:solidFill>
           <a:ln w="19050">
             <a:solidFill>
-              <a:srgbClr val="22D3EE"/>
+              <a:srgbClr val="00E5FF"/>
             </a:solidFill>
           </a:ln>
         </p:spPr>
@@ -4819,59 +4638,30 @@
           </a:fontRef>
         </p:style>
         <p:txBody>
-          <a:bodyPr rtlCol="0" anchor="ctr"/>
-          <a:lstStyle/>
-          <a:p>
-            <a:pPr algn="ctr"/>
-          </a:p>
-        </p:txBody>
-      </p:sp>
-      <p:sp>
-        <p:nvSpPr>
-          <p:cNvPr id="11" name="TextBox 10"/>
-          <p:cNvSpPr txBox="1"/>
-          <p:nvPr/>
-        </p:nvSpPr>
-        <p:spPr>
-          <a:xfrm>
-            <a:off x="1005840" y="4754880"/>
-            <a:ext cx="10241280" cy="822960"/>
-          </a:xfrm>
-          <a:prstGeom prst="rect">
-            <a:avLst/>
-          </a:prstGeom>
-          <a:noFill/>
-        </p:spPr>
-        <p:txBody>
-          <a:bodyPr wrap="square">
-            <a:spAutoFit/>
-          </a:bodyPr>
-          <a:lstStyle/>
+          <a:bodyPr rtlCol="0" anchor="ctr" wrap="square"/>
+          <a:lstStyle/>
+          <a:p>
+            <a:pPr algn="ctr">
+              <a:defRPr b="1" sz="1500">
+                <a:solidFill>
+                  <a:srgbClr val="00E5FF"/>
+                </a:solidFill>
+              </a:defRPr>
+            </a:pPr>
+            <a:r>
+              <a:t>For STI Administration</a:t>
+            </a:r>
+          </a:p>
           <a:p>
             <a:pPr>
-              <a:defRPr sz="1800" b="1">
-                <a:solidFill>
-                  <a:srgbClr val="22D3EE"/>
+              <a:defRPr sz="1100">
+                <a:solidFill>
+                  <a:srgbClr val="F0F0F0"/>
                 </a:solidFill>
               </a:defRPr>
             </a:pPr>
             <a:r>
-              <a:t>Cultivate Deep Curiosity</a:t>
-            </a:r>
-          </a:p>
-          <a:p>
-            <a:pPr>
-              <a:spcBef>
-                <a:spcPts val="300"/>
-              </a:spcBef>
-              <a:defRPr sz="1300">
-                <a:solidFill>
-                  <a:srgbClr val="F8FAFC"/>
-                </a:solidFill>
-              </a:defRPr>
-            </a:pPr>
-            <a:r>
-              <a:t>The greatest value of AI is freeing up time for deeper creative problem-solving.</a:t>
+              <a:t>Sponsor faculty training workshops and campus AI sandbox labs to bridge technological divides.</a:t>
             </a:r>
           </a:p>
         </p:txBody>
@@ -4888,7 +4678,7 @@
 </file>
 
 <file path=ppt/slides/slide11.xml><?xml version="1.0" encoding="utf-8"?>
-<p:sld xmlns:a="http://schemas.openxmlformats.org/drawingml/2006/main" xmlns:p="http://schemas.openxmlformats.org/presentationml/2006/main" xmlns:r="http://schemas.openxmlformats.org/officeDocument/2006/relationships">
+<p:sld xmlns:p14="http://schemas.microsoft.com/office/powerpoint/2010/main" xmlns:a="http://schemas.openxmlformats.org/drawingml/2006/main" xmlns:p="http://schemas.openxmlformats.org/presentationml/2006/main" xmlns:r="http://schemas.openxmlformats.org/officeDocument/2006/relationships">
   <p:cSld>
     <p:spTree>
       <p:nvGrpSpPr>
@@ -4940,16 +4730,40 @@
           </a:p>
         </p:txBody>
       </p:sp>
-      <p:sp>
-        <p:nvSpPr>
-          <p:cNvPr id="3" name="TextBox 2"/>
+      <p:pic>
+        <p:nvPicPr>
+          <p:cNvPr id="3" name="!!Hero_Image" descr="ai_closing.png"/>
+          <p:cNvPicPr>
+            <a:picLocks noChangeAspect="1"/>
+          </p:cNvPicPr>
+          <p:nvPr/>
+        </p:nvPicPr>
+        <p:blipFill>
+          <a:blip r:embed="rId2"/>
+          <a:stretch>
+            <a:fillRect/>
+          </a:stretch>
+        </p:blipFill>
+        <p:spPr>
+          <a:xfrm>
+            <a:off x="6217920" y="731520"/>
+            <a:ext cx="5303520" cy="5394960"/>
+          </a:xfrm>
+          <a:prstGeom prst="rect">
+            <a:avLst/>
+          </a:prstGeom>
+        </p:spPr>
+      </p:pic>
+      <p:sp>
+        <p:nvSpPr>
+          <p:cNvPr id="4" name="!!Title_Card"/>
           <p:cNvSpPr txBox="1"/>
           <p:nvPr/>
         </p:nvSpPr>
         <p:spPr>
           <a:xfrm>
-            <a:off x="731520" y="365760"/>
-            <a:ext cx="10058400" cy="365760"/>
+            <a:off x="731520" y="1463040"/>
+            <a:ext cx="5303520" cy="4114800"/>
           </a:xfrm>
           <a:prstGeom prst="rect">
             <a:avLst/>
@@ -4957,812 +4771,57 @@
           <a:noFill/>
         </p:spPr>
         <p:txBody>
-          <a:bodyPr wrap="none">
-            <a:spAutoFit/>
-          </a:bodyPr>
-          <a:lstStyle/>
-          <a:p>
-            <a:pPr>
-              <a:defRPr sz="1100" b="1">
-                <a:solidFill>
-                  <a:srgbClr val="22D3EE"/>
-                </a:solidFill>
-              </a:defRPr>
-            </a:pPr>
-            <a:r>
-              <a:t>SCHOLARLY DOCUMENTATION</a:t>
-            </a:r>
-          </a:p>
-        </p:txBody>
-      </p:sp>
-      <p:sp>
-        <p:nvSpPr>
-          <p:cNvPr id="4" name="TextBox 3"/>
-          <p:cNvSpPr txBox="1"/>
-          <p:nvPr/>
-        </p:nvSpPr>
-        <p:spPr>
-          <a:xfrm>
-            <a:off x="731520" y="685800"/>
-            <a:ext cx="10515600" cy="731520"/>
-          </a:xfrm>
-          <a:prstGeom prst="rect">
-            <a:avLst/>
-          </a:prstGeom>
-          <a:noFill/>
-        </p:spPr>
-        <p:txBody>
-          <a:bodyPr wrap="none">
-            <a:spAutoFit/>
-          </a:bodyPr>
-          <a:lstStyle/>
-          <a:p>
-            <a:pPr>
-              <a:defRPr sz="2600" b="1">
-                <a:solidFill>
-                  <a:srgbClr val="F8FAFC"/>
-                </a:solidFill>
-              </a:defRPr>
-            </a:pPr>
-            <a:r>
-              <a:t>Academic References (APA 7th Edition)</a:t>
-            </a:r>
-          </a:p>
-        </p:txBody>
-      </p:sp>
-      <p:sp>
-        <p:nvSpPr>
-          <p:cNvPr id="5" name="TextBox 4"/>
-          <p:cNvSpPr txBox="1"/>
-          <p:nvPr/>
-        </p:nvSpPr>
-        <p:spPr>
-          <a:xfrm>
-            <a:off x="731520" y="6400800"/>
-            <a:ext cx="10728655" cy="320040"/>
-          </a:xfrm>
-          <a:prstGeom prst="rect">
-            <a:avLst/>
-          </a:prstGeom>
-          <a:noFill/>
-        </p:spPr>
-        <p:txBody>
-          <a:bodyPr wrap="none">
-            <a:spAutoFit/>
-          </a:bodyPr>
-          <a:lstStyle/>
-          <a:p>
-            <a:pPr>
-              <a:defRPr sz="900">
-                <a:solidFill>
-                  <a:srgbClr val="94A3B8"/>
-                </a:solidFill>
-              </a:defRPr>
-            </a:pPr>
-            <a:r>
-              <a:t>STI West Negros University  •  Jhon Paulo V. Gascon  •  Slide 11 of 11</a:t>
-            </a:r>
-          </a:p>
-        </p:txBody>
-      </p:sp>
-      <p:sp>
-        <p:nvSpPr>
-          <p:cNvPr id="6" name="Rounded Rectangle 5"/>
-          <p:cNvSpPr/>
-          <p:nvPr/>
-        </p:nvSpPr>
-        <p:spPr>
-          <a:xfrm>
-            <a:off x="731520" y="1828800"/>
-            <a:ext cx="10728655" cy="4114800"/>
-          </a:xfrm>
-          <a:prstGeom prst="roundRect">
-            <a:avLst/>
-          </a:prstGeom>
-          <a:solidFill>
-            <a:srgbClr val="131F37"/>
-          </a:solidFill>
-          <a:ln w="12700">
-            <a:solidFill>
-              <a:srgbClr val="94A3B8"/>
-            </a:solidFill>
-          </a:ln>
-        </p:spPr>
-        <p:style>
-          <a:lnRef idx="1">
-            <a:schemeClr val="accent1"/>
-          </a:lnRef>
-          <a:fillRef idx="3">
-            <a:schemeClr val="accent1"/>
-          </a:fillRef>
-          <a:effectRef idx="2">
-            <a:schemeClr val="accent1"/>
-          </a:effectRef>
-          <a:fontRef idx="minor">
-            <a:schemeClr val="lt1"/>
-          </a:fontRef>
-        </p:style>
-        <p:txBody>
-          <a:bodyPr rtlCol="0" anchor="ctr"/>
-          <a:lstStyle/>
-          <a:p>
-            <a:pPr algn="ctr"/>
-          </a:p>
-        </p:txBody>
-      </p:sp>
-      <p:sp>
-        <p:nvSpPr>
-          <p:cNvPr id="7" name="TextBox 6"/>
-          <p:cNvSpPr txBox="1"/>
-          <p:nvPr/>
-        </p:nvSpPr>
-        <p:spPr>
-          <a:xfrm>
-            <a:off x="1097280" y="2103120"/>
-            <a:ext cx="10058400" cy="3566160"/>
-          </a:xfrm>
-          <a:prstGeom prst="rect">
-            <a:avLst/>
-          </a:prstGeom>
-          <a:noFill/>
-        </p:spPr>
-        <p:txBody>
           <a:bodyPr wrap="square">
             <a:spAutoFit/>
           </a:bodyPr>
           <a:lstStyle/>
           <a:p>
             <a:pPr>
-              <a:spcBef>
-                <a:spcPts val="1400"/>
-              </a:spcBef>
-              <a:defRPr sz="1300">
-                <a:solidFill>
-                  <a:srgbClr val="F8FAFC"/>
+              <a:defRPr sz="3200" b="1">
+                <a:solidFill>
+                  <a:srgbClr val="FFFFFF"/>
                 </a:solidFill>
               </a:defRPr>
             </a:pPr>
             <a:r>
-              <a:t>•  Bozkurt, A., &amp; Sharma, R. C. (2023). Generative AI and intellectual ethics in higher education. Asian Journal of Distance Education, 18(2), 1–12.</a:t>
+              <a:t>Empowering Tomorrow with AI</a:t>
             </a:r>
           </a:p>
           <a:p>
             <a:pPr>
-              <a:spcBef>
-                <a:spcPts val="1400"/>
-              </a:spcBef>
-              <a:defRPr sz="1300">
-                <a:solidFill>
-                  <a:srgbClr val="F8FAFC"/>
+              <a:defRPr sz="1400">
+                <a:solidFill>
+                  <a:srgbClr val="00E5FF"/>
                 </a:solidFill>
               </a:defRPr>
             </a:pPr>
             <a:r>
-              <a:t>•  Dwivedi, Y. K., et al. (2023). Multidisciplinary perspectives on conversational AI. International Journal of Information Management, 71, 102642.</a:t>
-            </a:r>
-          </a:p>
-          <a:p>
+              <a:t>Balancing Technological Innovation with Scholastic Rigor</a:t>
+            </a:r>
+          </a:p>
+          <a:p>
+            <a:br/>
             <a:pPr>
-              <a:spcBef>
-                <a:spcPts val="1400"/>
-              </a:spcBef>
-              <a:defRPr sz="1300">
-                <a:solidFill>
-                  <a:srgbClr val="F8FAFC"/>
+              <a:defRPr sz="1000">
+                <a:solidFill>
+                  <a:srgbClr val="96AABE"/>
                 </a:solidFill>
               </a:defRPr>
             </a:pPr>
             <a:r>
-              <a:t>•  UNESCO. (2023). Guidance for generative AI in education and research. UNESCO Guidelines.</a:t>
-            </a:r>
-          </a:p>
-        </p:txBody>
-      </p:sp>
-    </p:spTree>
-  </p:cSld>
-  <p:clrMapOvr>
-    <a:masterClrMapping/>
-  </p:clrMapOvr>
-  <p:transition spd="slow">
-    <p:fade/>
-  </p:transition>
-</p:sld>
-</file>
-
-<file path=ppt/slides/slide2.xml><?xml version="1.0" encoding="utf-8"?>
-<p:sld xmlns:a="http://schemas.openxmlformats.org/drawingml/2006/main" xmlns:p="http://schemas.openxmlformats.org/presentationml/2006/main" xmlns:r="http://schemas.openxmlformats.org/officeDocument/2006/relationships">
-  <p:cSld>
-    <p:spTree>
-      <p:nvGrpSpPr>
-        <p:cNvPr id="1" name=""/>
-        <p:cNvGrpSpPr/>
-        <p:nvPr/>
-      </p:nvGrpSpPr>
-      <p:grpSpPr/>
-      <p:sp>
-        <p:nvSpPr>
-          <p:cNvPr id="2" name="Rectangle 1"/>
-          <p:cNvSpPr/>
-          <p:nvPr/>
-        </p:nvSpPr>
-        <p:spPr>
-          <a:xfrm>
-            <a:off x="0" y="0"/>
-            <a:ext cx="12191695" cy="6858000"/>
-          </a:xfrm>
-          <a:prstGeom prst="rect">
-            <a:avLst/>
-          </a:prstGeom>
-          <a:solidFill>
-            <a:srgbClr val="0B1220"/>
-          </a:solidFill>
-          <a:ln>
-            <a:noFill/>
-          </a:ln>
-        </p:spPr>
-        <p:style>
-          <a:lnRef idx="1">
-            <a:schemeClr val="accent1"/>
-          </a:lnRef>
-          <a:fillRef idx="3">
-            <a:schemeClr val="accent1"/>
-          </a:fillRef>
-          <a:effectRef idx="2">
-            <a:schemeClr val="accent1"/>
-          </a:effectRef>
-          <a:fontRef idx="minor">
-            <a:schemeClr val="lt1"/>
-          </a:fontRef>
-        </p:style>
-        <p:txBody>
-          <a:bodyPr rtlCol="0" anchor="ctr"/>
-          <a:lstStyle/>
-          <a:p>
-            <a:pPr algn="ctr"/>
-          </a:p>
-        </p:txBody>
-      </p:sp>
-      <p:sp>
-        <p:nvSpPr>
-          <p:cNvPr id="3" name="TextBox 2"/>
-          <p:cNvSpPr txBox="1"/>
-          <p:nvPr/>
-        </p:nvSpPr>
-        <p:spPr>
-          <a:xfrm>
-            <a:off x="731520" y="365760"/>
-            <a:ext cx="10058400" cy="365760"/>
-          </a:xfrm>
-          <a:prstGeom prst="rect">
-            <a:avLst/>
-          </a:prstGeom>
-          <a:noFill/>
-        </p:spPr>
-        <p:txBody>
-          <a:bodyPr wrap="none">
-            <a:spAutoFit/>
-          </a:bodyPr>
-          <a:lstStyle/>
-          <a:p>
-            <a:pPr>
-              <a:defRPr sz="1100" b="1">
-                <a:solidFill>
-                  <a:srgbClr val="22D3EE"/>
-                </a:solidFill>
-              </a:defRPr>
-            </a:pPr>
-            <a:r>
-              <a:t>STRUCTURE &amp; OVERVIEW</a:t>
-            </a:r>
-          </a:p>
-        </p:txBody>
-      </p:sp>
-      <p:sp>
-        <p:nvSpPr>
-          <p:cNvPr id="4" name="TextBox 3"/>
-          <p:cNvSpPr txBox="1"/>
-          <p:nvPr/>
-        </p:nvSpPr>
-        <p:spPr>
-          <a:xfrm>
-            <a:off x="731520" y="685800"/>
-            <a:ext cx="10515600" cy="731520"/>
-          </a:xfrm>
-          <a:prstGeom prst="rect">
-            <a:avLst/>
-          </a:prstGeom>
-          <a:noFill/>
-        </p:spPr>
-        <p:txBody>
-          <a:bodyPr wrap="none">
-            <a:spAutoFit/>
-          </a:bodyPr>
-          <a:lstStyle/>
-          <a:p>
-            <a:pPr>
-              <a:defRPr sz="2600" b="1">
-                <a:solidFill>
-                  <a:srgbClr val="F8FAFC"/>
-                </a:solidFill>
-              </a:defRPr>
-            </a:pPr>
-            <a:r>
-              <a:t>Presentation Roadmap</a:t>
-            </a:r>
-          </a:p>
-        </p:txBody>
-      </p:sp>
-      <p:sp>
-        <p:nvSpPr>
-          <p:cNvPr id="5" name="TextBox 4"/>
-          <p:cNvSpPr txBox="1"/>
-          <p:nvPr/>
-        </p:nvSpPr>
-        <p:spPr>
-          <a:xfrm>
-            <a:off x="731520" y="6400800"/>
-            <a:ext cx="10728655" cy="320040"/>
-          </a:xfrm>
-          <a:prstGeom prst="rect">
-            <a:avLst/>
-          </a:prstGeom>
-          <a:noFill/>
-        </p:spPr>
-        <p:txBody>
-          <a:bodyPr wrap="none">
-            <a:spAutoFit/>
-          </a:bodyPr>
-          <a:lstStyle/>
-          <a:p>
-            <a:pPr>
-              <a:defRPr sz="900">
-                <a:solidFill>
-                  <a:srgbClr val="94A3B8"/>
-                </a:solidFill>
-              </a:defRPr>
-            </a:pPr>
-            <a:r>
-              <a:t>STI West Negros University  •  Jhon Paulo V. Gascon  •  Slide 2 of 11</a:t>
-            </a:r>
-          </a:p>
-        </p:txBody>
-      </p:sp>
-      <p:sp>
-        <p:nvSpPr>
-          <p:cNvPr id="6" name="Rounded Rectangle 5"/>
-          <p:cNvSpPr/>
-          <p:nvPr/>
-        </p:nvSpPr>
-        <p:spPr>
-          <a:xfrm>
-            <a:off x="731520" y="1828800"/>
-            <a:ext cx="2514600" cy="4114800"/>
-          </a:xfrm>
-          <a:prstGeom prst="roundRect">
-            <a:avLst/>
-          </a:prstGeom>
-          <a:solidFill>
-            <a:srgbClr val="131F37"/>
-          </a:solidFill>
-          <a:ln w="19050">
-            <a:solidFill>
-              <a:srgbClr val="22D3EE"/>
-            </a:solidFill>
-          </a:ln>
-        </p:spPr>
-        <p:style>
-          <a:lnRef idx="1">
-            <a:schemeClr val="accent1"/>
-          </a:lnRef>
-          <a:fillRef idx="3">
-            <a:schemeClr val="accent1"/>
-          </a:fillRef>
-          <a:effectRef idx="2">
-            <a:schemeClr val="accent1"/>
-          </a:effectRef>
-          <a:fontRef idx="minor">
-            <a:schemeClr val="lt1"/>
-          </a:fontRef>
-        </p:style>
-        <p:txBody>
-          <a:bodyPr rtlCol="0" anchor="ctr"/>
-          <a:lstStyle/>
-          <a:p>
-            <a:pPr algn="ctr"/>
-          </a:p>
-        </p:txBody>
-      </p:sp>
-      <p:sp>
-        <p:nvSpPr>
-          <p:cNvPr id="7" name="TextBox 6"/>
-          <p:cNvSpPr txBox="1"/>
-          <p:nvPr/>
-        </p:nvSpPr>
-        <p:spPr>
-          <a:xfrm>
-            <a:off x="914400" y="2103120"/>
-            <a:ext cx="2148840" cy="3474720"/>
-          </a:xfrm>
-          <a:prstGeom prst="rect">
-            <a:avLst/>
-          </a:prstGeom>
-          <a:noFill/>
-        </p:spPr>
-        <p:txBody>
-          <a:bodyPr wrap="square">
-            <a:spAutoFit/>
-          </a:bodyPr>
-          <a:lstStyle/>
-          <a:p>
-            <a:pPr>
-              <a:defRPr sz="3600" b="1">
-                <a:solidFill>
-                  <a:srgbClr val="22D3EE"/>
-                </a:solidFill>
-              </a:defRPr>
-            </a:pPr>
-            <a:r>
-              <a:t>01</a:t>
-            </a:r>
-          </a:p>
-          <a:p>
-            <a:pPr>
-              <a:spcBef>
-                <a:spcPts val="1400"/>
-              </a:spcBef>
-              <a:defRPr sz="1600" b="1">
-                <a:solidFill>
-                  <a:srgbClr val="F8FAFC"/>
-                </a:solidFill>
-              </a:defRPr>
-            </a:pPr>
-            <a:r>
-              <a:t>The AI Paradigm Shift</a:t>
-            </a:r>
-          </a:p>
-          <a:p>
-            <a:pPr>
-              <a:spcBef>
-                <a:spcPts val="1000"/>
-              </a:spcBef>
-              <a:defRPr sz="1300">
-                <a:solidFill>
-                  <a:srgbClr val="94A3B8"/>
-                </a:solidFill>
-              </a:defRPr>
-            </a:pPr>
-            <a:r>
-              <a:t>From static search to adaptive tutoring</a:t>
-            </a:r>
-          </a:p>
-        </p:txBody>
-      </p:sp>
-      <p:sp>
-        <p:nvSpPr>
-          <p:cNvPr id="8" name="Rounded Rectangle 7"/>
-          <p:cNvSpPr/>
-          <p:nvPr/>
-        </p:nvSpPr>
-        <p:spPr>
-          <a:xfrm>
-            <a:off x="3429000" y="1828800"/>
-            <a:ext cx="2514600" cy="4114800"/>
-          </a:xfrm>
-          <a:prstGeom prst="roundRect">
-            <a:avLst/>
-          </a:prstGeom>
-          <a:solidFill>
-            <a:srgbClr val="131F37"/>
-          </a:solidFill>
-          <a:ln w="19050">
-            <a:solidFill>
-              <a:srgbClr val="22D3EE"/>
-            </a:solidFill>
-          </a:ln>
-        </p:spPr>
-        <p:style>
-          <a:lnRef idx="1">
-            <a:schemeClr val="accent1"/>
-          </a:lnRef>
-          <a:fillRef idx="3">
-            <a:schemeClr val="accent1"/>
-          </a:fillRef>
-          <a:effectRef idx="2">
-            <a:schemeClr val="accent1"/>
-          </a:effectRef>
-          <a:fontRef idx="minor">
-            <a:schemeClr val="lt1"/>
-          </a:fontRef>
-        </p:style>
-        <p:txBody>
-          <a:bodyPr rtlCol="0" anchor="ctr"/>
-          <a:lstStyle/>
-          <a:p>
-            <a:pPr algn="ctr"/>
-          </a:p>
-        </p:txBody>
-      </p:sp>
-      <p:sp>
-        <p:nvSpPr>
-          <p:cNvPr id="9" name="TextBox 8"/>
-          <p:cNvSpPr txBox="1"/>
-          <p:nvPr/>
-        </p:nvSpPr>
-        <p:spPr>
-          <a:xfrm>
-            <a:off x="3611880" y="2103120"/>
-            <a:ext cx="2148840" cy="3474720"/>
-          </a:xfrm>
-          <a:prstGeom prst="rect">
-            <a:avLst/>
-          </a:prstGeom>
-          <a:noFill/>
-        </p:spPr>
-        <p:txBody>
-          <a:bodyPr wrap="square">
-            <a:spAutoFit/>
-          </a:bodyPr>
-          <a:lstStyle/>
-          <a:p>
-            <a:pPr>
-              <a:defRPr sz="3600" b="1">
-                <a:solidFill>
-                  <a:srgbClr val="22D3EE"/>
-                </a:solidFill>
-              </a:defRPr>
-            </a:pPr>
-            <a:r>
-              <a:t>02</a:t>
-            </a:r>
-          </a:p>
-          <a:p>
-            <a:pPr>
-              <a:spcBef>
-                <a:spcPts val="1400"/>
-              </a:spcBef>
-              <a:defRPr sz="1600" b="1">
-                <a:solidFill>
-                  <a:srgbClr val="F8FAFC"/>
-                </a:solidFill>
-              </a:defRPr>
-            </a:pPr>
-            <a:r>
-              <a:t>Productivity Dividends</a:t>
-            </a:r>
-          </a:p>
-          <a:p>
-            <a:pPr>
-              <a:spcBef>
-                <a:spcPts val="1000"/>
-              </a:spcBef>
-              <a:defRPr sz="1300">
-                <a:solidFill>
-                  <a:srgbClr val="94A3B8"/>
-                </a:solidFill>
-              </a:defRPr>
-            </a:pPr>
-            <a:r>
-              <a:t>Accelerating software design and research</a:t>
-            </a:r>
-          </a:p>
-        </p:txBody>
-      </p:sp>
-      <p:sp>
-        <p:nvSpPr>
-          <p:cNvPr id="10" name="Rounded Rectangle 9"/>
-          <p:cNvSpPr/>
-          <p:nvPr/>
-        </p:nvSpPr>
-        <p:spPr>
-          <a:xfrm>
-            <a:off x="6126480" y="1828800"/>
-            <a:ext cx="2514600" cy="4114800"/>
-          </a:xfrm>
-          <a:prstGeom prst="roundRect">
-            <a:avLst/>
-          </a:prstGeom>
-          <a:solidFill>
-            <a:srgbClr val="131F37"/>
-          </a:solidFill>
-          <a:ln w="19050">
-            <a:solidFill>
-              <a:srgbClr val="22D3EE"/>
-            </a:solidFill>
-          </a:ln>
-        </p:spPr>
-        <p:style>
-          <a:lnRef idx="1">
-            <a:schemeClr val="accent1"/>
-          </a:lnRef>
-          <a:fillRef idx="3">
-            <a:schemeClr val="accent1"/>
-          </a:fillRef>
-          <a:effectRef idx="2">
-            <a:schemeClr val="accent1"/>
-          </a:effectRef>
-          <a:fontRef idx="minor">
-            <a:schemeClr val="lt1"/>
-          </a:fontRef>
-        </p:style>
-        <p:txBody>
-          <a:bodyPr rtlCol="0" anchor="ctr"/>
-          <a:lstStyle/>
-          <a:p>
-            <a:pPr algn="ctr"/>
-          </a:p>
-        </p:txBody>
-      </p:sp>
-      <p:sp>
-        <p:nvSpPr>
-          <p:cNvPr id="11" name="TextBox 10"/>
-          <p:cNvSpPr txBox="1"/>
-          <p:nvPr/>
-        </p:nvSpPr>
-        <p:spPr>
-          <a:xfrm>
-            <a:off x="6309360" y="2103120"/>
-            <a:ext cx="2148840" cy="3474720"/>
-          </a:xfrm>
-          <a:prstGeom prst="rect">
-            <a:avLst/>
-          </a:prstGeom>
-          <a:noFill/>
-        </p:spPr>
-        <p:txBody>
-          <a:bodyPr wrap="square">
-            <a:spAutoFit/>
-          </a:bodyPr>
-          <a:lstStyle/>
-          <a:p>
-            <a:pPr>
-              <a:defRPr sz="3600" b="1">
-                <a:solidFill>
-                  <a:srgbClr val="22D3EE"/>
-                </a:solidFill>
-              </a:defRPr>
-            </a:pPr>
-            <a:r>
-              <a:t>03</a:t>
-            </a:r>
-          </a:p>
-          <a:p>
-            <a:pPr>
-              <a:spcBef>
-                <a:spcPts val="1400"/>
-              </a:spcBef>
-              <a:defRPr sz="1600" b="1">
-                <a:solidFill>
-                  <a:srgbClr val="F8FAFC"/>
-                </a:solidFill>
-              </a:defRPr>
-            </a:pPr>
-            <a:r>
-              <a:t>Critical Ethical Risks</a:t>
-            </a:r>
-          </a:p>
-          <a:p>
-            <a:pPr>
-              <a:spcBef>
-                <a:spcPts val="1000"/>
-              </a:spcBef>
-              <a:defRPr sz="1300">
-                <a:solidFill>
-                  <a:srgbClr val="94A3B8"/>
-                </a:solidFill>
-              </a:defRPr>
-            </a:pPr>
-            <a:r>
-              <a:t>Hallucinations, bias, and academic honesty</a:t>
-            </a:r>
-          </a:p>
-        </p:txBody>
-      </p:sp>
-      <p:sp>
-        <p:nvSpPr>
-          <p:cNvPr id="12" name="Rounded Rectangle 11"/>
-          <p:cNvSpPr/>
-          <p:nvPr/>
-        </p:nvSpPr>
-        <p:spPr>
-          <a:xfrm>
-            <a:off x="8823960" y="1828800"/>
-            <a:ext cx="2514600" cy="4114800"/>
-          </a:xfrm>
-          <a:prstGeom prst="roundRect">
-            <a:avLst/>
-          </a:prstGeom>
-          <a:solidFill>
-            <a:srgbClr val="131F37"/>
-          </a:solidFill>
-          <a:ln w="19050">
-            <a:solidFill>
-              <a:srgbClr val="22D3EE"/>
-            </a:solidFill>
-          </a:ln>
-        </p:spPr>
-        <p:style>
-          <a:lnRef idx="1">
-            <a:schemeClr val="accent1"/>
-          </a:lnRef>
-          <a:fillRef idx="3">
-            <a:schemeClr val="accent1"/>
-          </a:fillRef>
-          <a:effectRef idx="2">
-            <a:schemeClr val="accent1"/>
-          </a:effectRef>
-          <a:fontRef idx="minor">
-            <a:schemeClr val="lt1"/>
-          </a:fontRef>
-        </p:style>
-        <p:txBody>
-          <a:bodyPr rtlCol="0" anchor="ctr"/>
-          <a:lstStyle/>
-          <a:p>
-            <a:pPr algn="ctr"/>
-          </a:p>
-        </p:txBody>
-      </p:sp>
-      <p:sp>
-        <p:nvSpPr>
-          <p:cNvPr id="13" name="TextBox 12"/>
-          <p:cNvSpPr txBox="1"/>
-          <p:nvPr/>
-        </p:nvSpPr>
-        <p:spPr>
-          <a:xfrm>
-            <a:off x="9006840" y="2103120"/>
-            <a:ext cx="2148840" cy="3474720"/>
-          </a:xfrm>
-          <a:prstGeom prst="rect">
-            <a:avLst/>
-          </a:prstGeom>
-          <a:noFill/>
-        </p:spPr>
-        <p:txBody>
-          <a:bodyPr wrap="square">
-            <a:spAutoFit/>
-          </a:bodyPr>
-          <a:lstStyle/>
-          <a:p>
-            <a:pPr>
-              <a:defRPr sz="3600" b="1">
-                <a:solidFill>
-                  <a:srgbClr val="22D3EE"/>
-                </a:solidFill>
-              </a:defRPr>
-            </a:pPr>
-            <a:r>
-              <a:t>04</a:t>
-            </a:r>
-          </a:p>
-          <a:p>
-            <a:pPr>
-              <a:spcBef>
-                <a:spcPts val="1400"/>
-              </a:spcBef>
-              <a:defRPr sz="1600" b="1">
-                <a:solidFill>
-                  <a:srgbClr val="F8FAFC"/>
-                </a:solidFill>
-              </a:defRPr>
-            </a:pPr>
-            <a:r>
-              <a:t>Institutional Framework</a:t>
-            </a:r>
-          </a:p>
-          <a:p>
-            <a:pPr>
-              <a:spcBef>
-                <a:spcPts val="1000"/>
-              </a:spcBef>
-              <a:defRPr sz="1300">
-                <a:solidFill>
-                  <a:srgbClr val="94A3B8"/>
-                </a:solidFill>
-              </a:defRPr>
-            </a:pPr>
-            <a:r>
-              <a:t>Establishing ethical boundaries on campus</a:t>
+              <a:t>Image &amp; Academic Credits:</a:t>
+            </a:r>
+            <a:br/>
+            <a:r>
+              <a:t>• Visual Assets: Custom 3D renders &amp; high-res vector graphics.</a:t>
+            </a:r>
+            <a:br/>
+            <a:r>
+              <a:t>• Research Citations: APA 7th academic standards.</a:t>
+            </a:r>
+            <a:br/>
+            <a:r>
+              <a:t>• STI West Negros University • BSIT Program 2026–2027</a:t>
             </a:r>
           </a:p>
         </p:txBody>
@@ -5778,8 +4837,8 @@
 </p:sld>
 </file>
 
-<file path=ppt/slides/slide3.xml><?xml version="1.0" encoding="utf-8"?>
-<p:sld xmlns:a="http://schemas.openxmlformats.org/drawingml/2006/main" xmlns:p="http://schemas.openxmlformats.org/presentationml/2006/main" xmlns:r="http://schemas.openxmlformats.org/officeDocument/2006/relationships">
+<file path=ppt/slides/slide2.xml><?xml version="1.0" encoding="utf-8"?>
+<p:sld xmlns:p14="http://schemas.microsoft.com/office/powerpoint/2010/main" xmlns:a="http://schemas.openxmlformats.org/drawingml/2006/main" xmlns:p="http://schemas.openxmlformats.org/presentationml/2006/main" xmlns:r="http://schemas.openxmlformats.org/officeDocument/2006/relationships">
   <p:cSld>
     <p:spTree>
       <p:nvGrpSpPr>
@@ -5839,8 +4898,8 @@
         </p:nvSpPr>
         <p:spPr>
           <a:xfrm>
-            <a:off x="731520" y="365760"/>
-            <a:ext cx="10058400" cy="365760"/>
+            <a:off x="731520" y="457200"/>
+            <a:ext cx="10698480" cy="1005840"/>
           </a:xfrm>
           <a:prstGeom prst="rect">
             <a:avLst/>
@@ -5848,7 +4907,7 @@
           <a:noFill/>
         </p:spPr>
         <p:txBody>
-          <a:bodyPr wrap="none">
+          <a:bodyPr wrap="square">
             <a:spAutoFit/>
           </a:bodyPr>
           <a:lstStyle/>
@@ -5856,106 +4915,72 @@
             <a:pPr>
               <a:defRPr sz="1100" b="1">
                 <a:solidFill>
-                  <a:srgbClr val="22D3EE"/>
+                  <a:srgbClr val="00E5FF"/>
                 </a:solidFill>
               </a:defRPr>
             </a:pPr>
             <a:r>
-              <a:t>KEY TAKEAWAY</a:t>
-            </a:r>
-          </a:p>
-        </p:txBody>
-      </p:sp>
-      <p:sp>
-        <p:nvSpPr>
-          <p:cNvPr id="4" name="TextBox 3"/>
-          <p:cNvSpPr txBox="1"/>
+              <a:t>ACADEMIC CONTEXT</a:t>
+            </a:r>
+          </a:p>
+          <a:p>
+            <a:pPr>
+              <a:defRPr sz="2400" b="1">
+                <a:solidFill>
+                  <a:srgbClr val="FFFFFF"/>
+                </a:solidFill>
+              </a:defRPr>
+            </a:pPr>
+            <a:r>
+              <a:t>The Modern Classroom Landscape</a:t>
+            </a:r>
+          </a:p>
+        </p:txBody>
+      </p:sp>
+      <p:pic>
+        <p:nvPicPr>
+          <p:cNvPr id="4" name="!!Content_Image" descr="ai_landscape.png"/>
+          <p:cNvPicPr>
+            <a:picLocks noChangeAspect="1"/>
+          </p:cNvPicPr>
           <p:nvPr/>
-        </p:nvSpPr>
-        <p:spPr>
-          <a:xfrm>
-            <a:off x="731520" y="685800"/>
-            <a:ext cx="10515600" cy="731520"/>
+        </p:nvPicPr>
+        <p:blipFill>
+          <a:blip r:embed="rId2"/>
+          <a:stretch>
+            <a:fillRect/>
+          </a:stretch>
+        </p:blipFill>
+        <p:spPr>
+          <a:xfrm>
+            <a:off x="731520" y="1645920"/>
+            <a:ext cx="5029200" cy="4389120"/>
           </a:xfrm>
           <a:prstGeom prst="rect">
             <a:avLst/>
           </a:prstGeom>
-          <a:noFill/>
-        </p:spPr>
-        <p:txBody>
-          <a:bodyPr wrap="none">
-            <a:spAutoFit/>
-          </a:bodyPr>
-          <a:lstStyle/>
-          <a:p>
-            <a:pPr>
-              <a:defRPr sz="2600" b="1">
-                <a:solidFill>
-                  <a:srgbClr val="F8FAFC"/>
-                </a:solidFill>
-              </a:defRPr>
-            </a:pPr>
-            <a:r>
-              <a:t>Core Conceptual Thesis</a:t>
-            </a:r>
-          </a:p>
-        </p:txBody>
-      </p:sp>
-      <p:sp>
-        <p:nvSpPr>
-          <p:cNvPr id="5" name="TextBox 4"/>
-          <p:cNvSpPr txBox="1"/>
-          <p:nvPr/>
-        </p:nvSpPr>
-        <p:spPr>
-          <a:xfrm>
-            <a:off x="731520" y="6400800"/>
-            <a:ext cx="10728655" cy="320040"/>
-          </a:xfrm>
-          <a:prstGeom prst="rect">
-            <a:avLst/>
-          </a:prstGeom>
-          <a:noFill/>
-        </p:spPr>
-        <p:txBody>
-          <a:bodyPr wrap="none">
-            <a:spAutoFit/>
-          </a:bodyPr>
-          <a:lstStyle/>
-          <a:p>
-            <a:pPr>
-              <a:defRPr sz="900">
-                <a:solidFill>
-                  <a:srgbClr val="94A3B8"/>
-                </a:solidFill>
-              </a:defRPr>
-            </a:pPr>
-            <a:r>
-              <a:t>STI West Negros University  •  Jhon Paulo V. Gascon  •  Slide 3 of 11</a:t>
-            </a:r>
-          </a:p>
-        </p:txBody>
-      </p:sp>
-      <p:sp>
-        <p:nvSpPr>
-          <p:cNvPr id="6" name="Rounded Rectangle 5"/>
+        </p:spPr>
+      </p:pic>
+      <p:sp>
+        <p:nvSpPr>
+          <p:cNvPr id="5" name="!!Card_1"/>
           <p:cNvSpPr/>
           <p:nvPr/>
         </p:nvSpPr>
         <p:spPr>
           <a:xfrm>
-            <a:off x="731520" y="1828800"/>
-            <a:ext cx="10728655" cy="4114800"/>
+            <a:off x="6126480" y="1645920"/>
+            <a:ext cx="5303520" cy="1280160"/>
           </a:xfrm>
           <a:prstGeom prst="roundRect">
             <a:avLst/>
           </a:prstGeom>
           <a:solidFill>
-            <a:srgbClr val="131F37"/>
+            <a:srgbClr val="131D32"/>
           </a:solidFill>
-          <a:ln w="25400">
+          <a:ln w="12700">
             <a:solidFill>
-              <a:srgbClr val="7C3AED"/>
+              <a:srgbClr val="00E5FF"/>
             </a:solidFill>
           </a:ln>
         </p:spPr>
@@ -5974,6 +4999,232 @@
           </a:fontRef>
         </p:style>
         <p:txBody>
+          <a:bodyPr rtlCol="0" anchor="ctr" wrap="square"/>
+          <a:lstStyle/>
+          <a:p>
+            <a:pPr algn="ctr">
+              <a:defRPr b="1" sz="1300">
+                <a:solidFill>
+                  <a:srgbClr val="FFFFFF"/>
+                </a:solidFill>
+              </a:defRPr>
+            </a:pPr>
+            <a:r>
+              <a:t>Rapid Collegiate Adoption</a:t>
+            </a:r>
+          </a:p>
+          <a:p>
+            <a:pPr>
+              <a:defRPr sz="1050">
+                <a:solidFill>
+                  <a:srgbClr val="DCE6F2"/>
+                </a:solidFill>
+              </a:defRPr>
+            </a:pPr>
+            <a:r>
+              <a:t>Over 78% of undergraduate students leverage large language models for conceptual synthesis.</a:t>
+            </a:r>
+          </a:p>
+        </p:txBody>
+      </p:sp>
+      <p:sp>
+        <p:nvSpPr>
+          <p:cNvPr id="6" name="!!Card_2"/>
+          <p:cNvSpPr/>
+          <p:nvPr/>
+        </p:nvSpPr>
+        <p:spPr>
+          <a:xfrm>
+            <a:off x="6126480" y="3108960"/>
+            <a:ext cx="5303520" cy="1280160"/>
+          </a:xfrm>
+          <a:prstGeom prst="roundRect">
+            <a:avLst/>
+          </a:prstGeom>
+          <a:solidFill>
+            <a:srgbClr val="131D32"/>
+          </a:solidFill>
+          <a:ln w="12700">
+            <a:solidFill>
+              <a:srgbClr val="00E5FF"/>
+            </a:solidFill>
+          </a:ln>
+        </p:spPr>
+        <p:style>
+          <a:lnRef idx="1">
+            <a:schemeClr val="accent1"/>
+          </a:lnRef>
+          <a:fillRef idx="3">
+            <a:schemeClr val="accent1"/>
+          </a:fillRef>
+          <a:effectRef idx="2">
+            <a:schemeClr val="accent1"/>
+          </a:effectRef>
+          <a:fontRef idx="minor">
+            <a:schemeClr val="lt1"/>
+          </a:fontRef>
+        </p:style>
+        <p:txBody>
+          <a:bodyPr rtlCol="0" anchor="ctr" wrap="square"/>
+          <a:lstStyle/>
+          <a:p>
+            <a:pPr algn="ctr">
+              <a:defRPr b="1" sz="1300">
+                <a:solidFill>
+                  <a:srgbClr val="FFFFFF"/>
+                </a:solidFill>
+              </a:defRPr>
+            </a:pPr>
+            <a:r>
+              <a:t>Shift from Rote to Evaluation</a:t>
+            </a:r>
+          </a:p>
+          <a:p>
+            <a:pPr>
+              <a:defRPr sz="1050">
+                <a:solidFill>
+                  <a:srgbClr val="DCE6F2"/>
+                </a:solidFill>
+              </a:defRPr>
+            </a:pPr>
+            <a:r>
+              <a:t>Educational paradigms are transitioning from memorizing facts to critically evaluating AI outputs.</a:t>
+            </a:r>
+          </a:p>
+        </p:txBody>
+      </p:sp>
+      <p:sp>
+        <p:nvSpPr>
+          <p:cNvPr id="7" name="!!Card_3"/>
+          <p:cNvSpPr/>
+          <p:nvPr/>
+        </p:nvSpPr>
+        <p:spPr>
+          <a:xfrm>
+            <a:off x="6126480" y="4572000"/>
+            <a:ext cx="5303520" cy="1280160"/>
+          </a:xfrm>
+          <a:prstGeom prst="roundRect">
+            <a:avLst/>
+          </a:prstGeom>
+          <a:solidFill>
+            <a:srgbClr val="131D32"/>
+          </a:solidFill>
+          <a:ln w="12700">
+            <a:solidFill>
+              <a:srgbClr val="00E5FF"/>
+            </a:solidFill>
+          </a:ln>
+        </p:spPr>
+        <p:style>
+          <a:lnRef idx="1">
+            <a:schemeClr val="accent1"/>
+          </a:lnRef>
+          <a:fillRef idx="3">
+            <a:schemeClr val="accent1"/>
+          </a:fillRef>
+          <a:effectRef idx="2">
+            <a:schemeClr val="accent1"/>
+          </a:effectRef>
+          <a:fontRef idx="minor">
+            <a:schemeClr val="lt1"/>
+          </a:fontRef>
+        </p:style>
+        <p:txBody>
+          <a:bodyPr rtlCol="0" anchor="ctr" wrap="square"/>
+          <a:lstStyle/>
+          <a:p>
+            <a:pPr algn="ctr">
+              <a:defRPr b="1" sz="1300">
+                <a:solidFill>
+                  <a:srgbClr val="FFFFFF"/>
+                </a:solidFill>
+              </a:defRPr>
+            </a:pPr>
+            <a:r>
+              <a:t>Faculty Integration Challenges</a:t>
+            </a:r>
+          </a:p>
+          <a:p>
+            <a:pPr>
+              <a:defRPr sz="1050">
+                <a:solidFill>
+                  <a:srgbClr val="DCE6F2"/>
+                </a:solidFill>
+              </a:defRPr>
+            </a:pPr>
+            <a:r>
+              <a:t>Institutions face the urgent imperative to establish coherent, transparent AI classroom syllabi.</a:t>
+            </a:r>
+          </a:p>
+        </p:txBody>
+      </p:sp>
+    </p:spTree>
+  </p:cSld>
+  <p:clrMapOvr>
+    <a:masterClrMapping/>
+  </p:clrMapOvr>
+  <mc:AlternateContent xmlns:mc="http://schemas.openxmlformats.org/markup-compatibility/2006">
+    <mc:Choice xmlns:p159="http://schemas.microsoft.com/office/powerpoint/2015/09/main" Requires="p159">
+      <p:transition spd="slow" p14:dur="1500">
+        <p159:morph option="byObject"/>
+      </p:transition>
+    </mc:Choice>
+    <mc:Fallback>
+      <p:transition spd="slow">
+        <p:fade/>
+      </p:transition>
+    </mc:Fallback>
+  </mc:AlternateContent>
+</p:sld>
+</file>
+
+<file path=ppt/slides/slide3.xml><?xml version="1.0" encoding="utf-8"?>
+<p:sld xmlns:p14="http://schemas.microsoft.com/office/powerpoint/2010/main" xmlns:a="http://schemas.openxmlformats.org/drawingml/2006/main" xmlns:p="http://schemas.openxmlformats.org/presentationml/2006/main" xmlns:r="http://schemas.openxmlformats.org/officeDocument/2006/relationships">
+  <p:cSld>
+    <p:spTree>
+      <p:nvGrpSpPr>
+        <p:cNvPr id="1" name=""/>
+        <p:cNvGrpSpPr/>
+        <p:nvPr/>
+      </p:nvGrpSpPr>
+      <p:grpSpPr/>
+      <p:sp>
+        <p:nvSpPr>
+          <p:cNvPr id="2" name="Rectangle 1"/>
+          <p:cNvSpPr/>
+          <p:nvPr/>
+        </p:nvSpPr>
+        <p:spPr>
+          <a:xfrm>
+            <a:off x="0" y="0"/>
+            <a:ext cx="12191695" cy="6858000"/>
+          </a:xfrm>
+          <a:prstGeom prst="rect">
+            <a:avLst/>
+          </a:prstGeom>
+          <a:solidFill>
+            <a:srgbClr val="0B1220"/>
+          </a:solidFill>
+          <a:ln>
+            <a:noFill/>
+          </a:ln>
+        </p:spPr>
+        <p:style>
+          <a:lnRef idx="1">
+            <a:schemeClr val="accent1"/>
+          </a:lnRef>
+          <a:fillRef idx="3">
+            <a:schemeClr val="accent1"/>
+          </a:fillRef>
+          <a:effectRef idx="2">
+            <a:schemeClr val="accent1"/>
+          </a:effectRef>
+          <a:fontRef idx="minor">
+            <a:schemeClr val="lt1"/>
+          </a:fontRef>
+        </p:style>
+        <p:txBody>
           <a:bodyPr rtlCol="0" anchor="ctr"/>
           <a:lstStyle/>
           <a:p>
@@ -5981,16 +5232,40 @@
           </a:p>
         </p:txBody>
       </p:sp>
-      <p:sp>
-        <p:nvSpPr>
-          <p:cNvPr id="7" name="TextBox 6"/>
+      <p:pic>
+        <p:nvPicPr>
+          <p:cNvPr id="3" name="!!Hero_Image" descr="ai_tutoring.png"/>
+          <p:cNvPicPr>
+            <a:picLocks noChangeAspect="1"/>
+          </p:cNvPicPr>
+          <p:nvPr/>
+        </p:nvPicPr>
+        <p:blipFill>
+          <a:blip r:embed="rId2"/>
+          <a:stretch>
+            <a:fillRect/>
+          </a:stretch>
+        </p:blipFill>
+        <p:spPr>
+          <a:xfrm>
+            <a:off x="731520" y="914400"/>
+            <a:ext cx="5029200" cy="5029200"/>
+          </a:xfrm>
+          <a:prstGeom prst="rect">
+            <a:avLst/>
+          </a:prstGeom>
+        </p:spPr>
+      </p:pic>
+      <p:sp>
+        <p:nvSpPr>
+          <p:cNvPr id="4" name="!!Title_Card"/>
           <p:cNvSpPr txBox="1"/>
           <p:nvPr/>
         </p:nvSpPr>
         <p:spPr>
           <a:xfrm>
-            <a:off x="1371600" y="2743200"/>
-            <a:ext cx="9448495" cy="2286000"/>
+            <a:off x="6217920" y="2011680"/>
+            <a:ext cx="5303520" cy="3200400"/>
           </a:xfrm>
           <a:prstGeom prst="rect">
             <a:avLst/>
@@ -6003,15 +5278,27 @@
           </a:bodyPr>
           <a:lstStyle/>
           <a:p>
-            <a:pPr algn="ctr">
-              <a:defRPr sz="3400" b="1">
-                <a:solidFill>
-                  <a:srgbClr val="22D3EE"/>
+            <a:pPr>
+              <a:defRPr sz="3200" b="1">
+                <a:solidFill>
+                  <a:srgbClr val="FFFFFF"/>
                 </a:solidFill>
               </a:defRPr>
             </a:pPr>
             <a:r>
-              <a:t>"AI is not a replacement for human critical thinking. It is an intellectual amplifier."</a:t>
+              <a:t>Intelligent Tutoring Systems</a:t>
+            </a:r>
+          </a:p>
+          <a:p>
+            <a:pPr>
+              <a:defRPr sz="1600">
+                <a:solidFill>
+                  <a:srgbClr val="00E5FF"/>
+                </a:solidFill>
+              </a:defRPr>
+            </a:pPr>
+            <a:r>
+              <a:t>Transforming One-Way Lectures into 24/7 Adaptive Mentorship</a:t>
             </a:r>
           </a:p>
         </p:txBody>
@@ -6028,7 +5315,7 @@
 </file>
 
 <file path=ppt/slides/slide4.xml><?xml version="1.0" encoding="utf-8"?>
-<p:sld xmlns:a="http://schemas.openxmlformats.org/drawingml/2006/main" xmlns:p="http://schemas.openxmlformats.org/presentationml/2006/main" xmlns:r="http://schemas.openxmlformats.org/officeDocument/2006/relationships">
+<p:sld xmlns:p14="http://schemas.microsoft.com/office/powerpoint/2010/main" xmlns:a="http://schemas.openxmlformats.org/drawingml/2006/main" xmlns:p="http://schemas.openxmlformats.org/presentationml/2006/main" xmlns:r="http://schemas.openxmlformats.org/officeDocument/2006/relationships">
   <p:cSld>
     <p:spTree>
       <p:nvGrpSpPr>
@@ -6088,8 +5375,8 @@
         </p:nvSpPr>
         <p:spPr>
           <a:xfrm>
-            <a:off x="731520" y="6400800"/>
-            <a:ext cx="10728655" cy="320040"/>
+            <a:off x="731520" y="457200"/>
+            <a:ext cx="10698480" cy="1005840"/>
           </a:xfrm>
           <a:prstGeom prst="rect">
             <a:avLst/>
@@ -6097,43 +5384,81 @@
           <a:noFill/>
         </p:spPr>
         <p:txBody>
-          <a:bodyPr wrap="none">
+          <a:bodyPr wrap="square">
             <a:spAutoFit/>
           </a:bodyPr>
           <a:lstStyle/>
           <a:p>
             <a:pPr>
-              <a:defRPr sz="900">
-                <a:solidFill>
-                  <a:srgbClr val="94A3B8"/>
+              <a:defRPr sz="1100" b="1">
+                <a:solidFill>
+                  <a:srgbClr val="00E5FF"/>
                 </a:solidFill>
               </a:defRPr>
             </a:pPr>
             <a:r>
-              <a:t>STI West Negros University  •  Jhon Paulo V. Gascon  •  Slide 4 of 11</a:t>
-            </a:r>
-          </a:p>
-        </p:txBody>
-      </p:sp>
-      <p:sp>
-        <p:nvSpPr>
-          <p:cNvPr id="4" name="Rectangle 3"/>
-          <p:cNvSpPr/>
+              <a:t>PEDAGOGICAL BENEFITS</a:t>
+            </a:r>
+          </a:p>
+          <a:p>
+            <a:pPr>
+              <a:defRPr sz="2400" b="1">
+                <a:solidFill>
+                  <a:srgbClr val="FFFFFF"/>
+                </a:solidFill>
+              </a:defRPr>
+            </a:pPr>
+            <a:r>
+              <a:t>Adaptive Feedback Mechanisms</a:t>
+            </a:r>
+          </a:p>
+        </p:txBody>
+      </p:sp>
+      <p:pic>
+        <p:nvPicPr>
+          <p:cNvPr id="4" name="!!Content_Image" descr="ai_assessment.png"/>
+          <p:cNvPicPr>
+            <a:picLocks noChangeAspect="1"/>
+          </p:cNvPicPr>
           <p:nvPr/>
-        </p:nvSpPr>
-        <p:spPr>
-          <a:xfrm>
-            <a:off x="731520" y="2286000"/>
-            <a:ext cx="457200" cy="2560320"/>
+        </p:nvPicPr>
+        <p:blipFill>
+          <a:blip r:embed="rId2"/>
+          <a:stretch>
+            <a:fillRect/>
+          </a:stretch>
+        </p:blipFill>
+        <p:spPr>
+          <a:xfrm>
+            <a:off x="731520" y="1645920"/>
+            <a:ext cx="5029200" cy="4389120"/>
           </a:xfrm>
           <a:prstGeom prst="rect">
             <a:avLst/>
           </a:prstGeom>
+        </p:spPr>
+      </p:pic>
+      <p:sp>
+        <p:nvSpPr>
+          <p:cNvPr id="5" name="!!Card_1"/>
+          <p:cNvSpPr/>
+          <p:nvPr/>
+        </p:nvSpPr>
+        <p:spPr>
+          <a:xfrm>
+            <a:off x="6126480" y="1645920"/>
+            <a:ext cx="5303520" cy="1280160"/>
+          </a:xfrm>
+          <a:prstGeom prst="roundRect">
+            <a:avLst/>
+          </a:prstGeom>
           <a:solidFill>
-            <a:srgbClr val="22D3EE"/>
+            <a:srgbClr val="131D32"/>
           </a:solidFill>
-          <a:ln>
-            <a:noFill/>
+          <a:ln w="12700">
+            <a:solidFill>
+              <a:srgbClr val="00E5FF"/>
+            </a:solidFill>
           </a:ln>
         </p:spPr>
         <p:style>
@@ -6151,79 +5476,162 @@
           </a:fontRef>
         </p:style>
         <p:txBody>
-          <a:bodyPr rtlCol="0" anchor="ctr"/>
-          <a:lstStyle/>
-          <a:p>
-            <a:pPr algn="ctr"/>
-          </a:p>
-        </p:txBody>
-      </p:sp>
-      <p:sp>
-        <p:nvSpPr>
-          <p:cNvPr id="5" name="TextBox 4"/>
-          <p:cNvSpPr txBox="1"/>
+          <a:bodyPr rtlCol="0" anchor="ctr" wrap="square"/>
+          <a:lstStyle/>
+          <a:p>
+            <a:pPr algn="ctr">
+              <a:defRPr b="1" sz="1300">
+                <a:solidFill>
+                  <a:srgbClr val="FFFFFF"/>
+                </a:solidFill>
+              </a:defRPr>
+            </a:pPr>
+            <a:r>
+              <a:t>Personalized Learning Cadence</a:t>
+            </a:r>
+          </a:p>
+          <a:p>
+            <a:pPr>
+              <a:defRPr sz="1050">
+                <a:solidFill>
+                  <a:srgbClr val="DCE6F2"/>
+                </a:solidFill>
+              </a:defRPr>
+            </a:pPr>
+            <a:r>
+              <a:t>AI models detect cognitive misconceptions and tailor practice problems in real time.</a:t>
+            </a:r>
+          </a:p>
+        </p:txBody>
+      </p:sp>
+      <p:sp>
+        <p:nvSpPr>
+          <p:cNvPr id="6" name="!!Card_2"/>
+          <p:cNvSpPr/>
           <p:nvPr/>
         </p:nvSpPr>
         <p:spPr>
           <a:xfrm>
-            <a:off x="1463040" y="2194560"/>
-            <a:ext cx="9601200" cy="1371600"/>
-          </a:xfrm>
-          <a:prstGeom prst="rect">
+            <a:off x="6126480" y="3108960"/>
+            <a:ext cx="5303520" cy="1280160"/>
+          </a:xfrm>
+          <a:prstGeom prst="roundRect">
             <a:avLst/>
           </a:prstGeom>
-          <a:noFill/>
-        </p:spPr>
-        <p:txBody>
-          <a:bodyPr wrap="none">
-            <a:spAutoFit/>
-          </a:bodyPr>
-          <a:lstStyle/>
+          <a:solidFill>
+            <a:srgbClr val="131D32"/>
+          </a:solidFill>
+          <a:ln w="12700">
+            <a:solidFill>
+              <a:srgbClr val="00E5FF"/>
+            </a:solidFill>
+          </a:ln>
+        </p:spPr>
+        <p:style>
+          <a:lnRef idx="1">
+            <a:schemeClr val="accent1"/>
+          </a:lnRef>
+          <a:fillRef idx="3">
+            <a:schemeClr val="accent1"/>
+          </a:fillRef>
+          <a:effectRef idx="2">
+            <a:schemeClr val="accent1"/>
+          </a:effectRef>
+          <a:fontRef idx="minor">
+            <a:schemeClr val="lt1"/>
+          </a:fontRef>
+        </p:style>
+        <p:txBody>
+          <a:bodyPr rtlCol="0" anchor="ctr" wrap="square"/>
+          <a:lstStyle/>
+          <a:p>
+            <a:pPr algn="ctr">
+              <a:defRPr b="1" sz="1300">
+                <a:solidFill>
+                  <a:srgbClr val="FFFFFF"/>
+                </a:solidFill>
+              </a:defRPr>
+            </a:pPr>
+            <a:r>
+              <a:t>Instantaneous Code Debugging</a:t>
+            </a:r>
+          </a:p>
           <a:p>
             <a:pPr>
-              <a:defRPr sz="3800" b="1">
-                <a:solidFill>
-                  <a:srgbClr val="F8FAFC"/>
+              <a:defRPr sz="1050">
+                <a:solidFill>
+                  <a:srgbClr val="DCE6F2"/>
                 </a:solidFill>
               </a:defRPr>
             </a:pPr>
             <a:r>
-              <a:t>Part I: The Technological Shift</a:t>
-            </a:r>
-          </a:p>
-        </p:txBody>
-      </p:sp>
-      <p:sp>
-        <p:nvSpPr>
-          <p:cNvPr id="6" name="TextBox 5"/>
-          <p:cNvSpPr txBox="1"/>
+              <a:t>For BSIT students, automated syntax checkers explain logic bugs line-by-line.</a:t>
+            </a:r>
+          </a:p>
+        </p:txBody>
+      </p:sp>
+      <p:sp>
+        <p:nvSpPr>
+          <p:cNvPr id="7" name="!!Card_3"/>
+          <p:cNvSpPr/>
           <p:nvPr/>
         </p:nvSpPr>
         <p:spPr>
           <a:xfrm>
-            <a:off x="1463040" y="3657600"/>
-            <a:ext cx="9601200" cy="1371600"/>
-          </a:xfrm>
-          <a:prstGeom prst="rect">
+            <a:off x="6126480" y="4572000"/>
+            <a:ext cx="5303520" cy="1280160"/>
+          </a:xfrm>
+          <a:prstGeom prst="roundRect">
             <a:avLst/>
           </a:prstGeom>
-          <a:noFill/>
-        </p:spPr>
-        <p:txBody>
-          <a:bodyPr wrap="none">
-            <a:spAutoFit/>
-          </a:bodyPr>
-          <a:lstStyle/>
+          <a:solidFill>
+            <a:srgbClr val="131D32"/>
+          </a:solidFill>
+          <a:ln w="12700">
+            <a:solidFill>
+              <a:srgbClr val="00E5FF"/>
+            </a:solidFill>
+          </a:ln>
+        </p:spPr>
+        <p:style>
+          <a:lnRef idx="1">
+            <a:schemeClr val="accent1"/>
+          </a:lnRef>
+          <a:fillRef idx="3">
+            <a:schemeClr val="accent1"/>
+          </a:fillRef>
+          <a:effectRef idx="2">
+            <a:schemeClr val="accent1"/>
+          </a:effectRef>
+          <a:fontRef idx="minor">
+            <a:schemeClr val="lt1"/>
+          </a:fontRef>
+        </p:style>
+        <p:txBody>
+          <a:bodyPr rtlCol="0" anchor="ctr" wrap="square"/>
+          <a:lstStyle/>
+          <a:p>
+            <a:pPr algn="ctr">
+              <a:defRPr b="1" sz="1300">
+                <a:solidFill>
+                  <a:srgbClr val="FFFFFF"/>
+                </a:solidFill>
+              </a:defRPr>
+            </a:pPr>
+            <a:r>
+              <a:t>Continuous Formative Feedback</a:t>
+            </a:r>
+          </a:p>
           <a:p>
             <a:pPr>
-              <a:defRPr sz="2200">
-                <a:solidFill>
-                  <a:srgbClr val="94A3B8"/>
+              <a:defRPr sz="1050">
+                <a:solidFill>
+                  <a:srgbClr val="DCE6F2"/>
                 </a:solidFill>
               </a:defRPr>
             </a:pPr>
             <a:r>
-              <a:t>How generative models transformed the educational paradigm.</a:t>
+              <a:t>Low-stakes continuous self-assessments replace high-anxiety cram sessions.</a:t>
             </a:r>
           </a:p>
         </p:txBody>
@@ -6233,14 +5641,23 @@
   <p:clrMapOvr>
     <a:masterClrMapping/>
   </p:clrMapOvr>
-  <p:transition spd="med">
-    <p:push dir="u"/>
-  </p:transition>
+  <mc:AlternateContent xmlns:mc="http://schemas.openxmlformats.org/markup-compatibility/2006">
+    <mc:Choice xmlns:p159="http://schemas.microsoft.com/office/powerpoint/2015/09/main" Requires="p159">
+      <p:transition spd="slow" p14:dur="1500">
+        <p159:morph option="byObject"/>
+      </p:transition>
+    </mc:Choice>
+    <mc:Fallback>
+      <p:transition spd="slow">
+        <p:fade/>
+      </p:transition>
+    </mc:Fallback>
+  </mc:AlternateContent>
 </p:sld>
 </file>
 
 <file path=ppt/slides/slide5.xml><?xml version="1.0" encoding="utf-8"?>
-<p:sld xmlns:a="http://schemas.openxmlformats.org/drawingml/2006/main" xmlns:p="http://schemas.openxmlformats.org/presentationml/2006/main" xmlns:r="http://schemas.openxmlformats.org/officeDocument/2006/relationships">
+<p:sld xmlns:p14="http://schemas.microsoft.com/office/powerpoint/2010/main" xmlns:a="http://schemas.openxmlformats.org/drawingml/2006/main" xmlns:p="http://schemas.openxmlformats.org/presentationml/2006/main" xmlns:r="http://schemas.openxmlformats.org/officeDocument/2006/relationships">
   <p:cSld>
     <p:spTree>
       <p:nvGrpSpPr>
@@ -6300,8 +5717,8 @@
         </p:nvSpPr>
         <p:spPr>
           <a:xfrm>
-            <a:off x="731520" y="365760"/>
-            <a:ext cx="10058400" cy="365760"/>
+            <a:off x="731520" y="457200"/>
+            <a:ext cx="10698480" cy="1005840"/>
           </a:xfrm>
           <a:prstGeom prst="rect">
             <a:avLst/>
@@ -6309,7 +5726,7 @@
           <a:noFill/>
         </p:spPr>
         <p:txBody>
-          <a:bodyPr wrap="none">
+          <a:bodyPr wrap="square">
             <a:spAutoFit/>
           </a:bodyPr>
           <a:lstStyle/>
@@ -6317,106 +5734,48 @@
             <a:pPr>
               <a:defRPr sz="1100" b="1">
                 <a:solidFill>
-                  <a:srgbClr val="22D3EE"/>
+                  <a:srgbClr val="00E5FF"/>
                 </a:solidFill>
               </a:defRPr>
             </a:pPr>
             <a:r>
-              <a:t>EMPIRICAL EVIDENCE &amp; TRENDS</a:t>
-            </a:r>
-          </a:p>
-        </p:txBody>
-      </p:sp>
-      <p:sp>
-        <p:nvSpPr>
-          <p:cNvPr id="4" name="TextBox 3"/>
-          <p:cNvSpPr txBox="1"/>
-          <p:nvPr/>
-        </p:nvSpPr>
-        <p:spPr>
-          <a:xfrm>
-            <a:off x="731520" y="685800"/>
-            <a:ext cx="10515600" cy="731520"/>
-          </a:xfrm>
-          <a:prstGeom prst="rect">
-            <a:avLst/>
-          </a:prstGeom>
-          <a:noFill/>
-        </p:spPr>
-        <p:txBody>
-          <a:bodyPr wrap="none">
-            <a:spAutoFit/>
-          </a:bodyPr>
-          <a:lstStyle/>
+              <a:t>PEDAGOGICAL LEVERS</a:t>
+            </a:r>
+          </a:p>
           <a:p>
             <a:pPr>
-              <a:defRPr sz="2600" b="1">
-                <a:solidFill>
-                  <a:srgbClr val="F8FAFC"/>
+              <a:defRPr sz="2400" b="1">
+                <a:solidFill>
+                  <a:srgbClr val="FFFFFF"/>
                 </a:solidFill>
               </a:defRPr>
             </a:pPr>
             <a:r>
-              <a:t>Measuring the Campus AI Adoption Surge</a:t>
-            </a:r>
-          </a:p>
-        </p:txBody>
-      </p:sp>
-      <p:sp>
-        <p:nvSpPr>
-          <p:cNvPr id="5" name="TextBox 4"/>
-          <p:cNvSpPr txBox="1"/>
-          <p:nvPr/>
-        </p:nvSpPr>
-        <p:spPr>
-          <a:xfrm>
-            <a:off x="731520" y="6400800"/>
-            <a:ext cx="10728655" cy="320040"/>
-          </a:xfrm>
-          <a:prstGeom prst="rect">
-            <a:avLst/>
-          </a:prstGeom>
-          <a:noFill/>
-        </p:spPr>
-        <p:txBody>
-          <a:bodyPr wrap="none">
-            <a:spAutoFit/>
-          </a:bodyPr>
-          <a:lstStyle/>
-          <a:p>
-            <a:pPr>
-              <a:defRPr sz="900">
-                <a:solidFill>
-                  <a:srgbClr val="94A3B8"/>
-                </a:solidFill>
-              </a:defRPr>
-            </a:pPr>
-            <a:r>
-              <a:t>STI West Negros University  •  Jhon Paulo V. Gascon  •  Slide 5 of 11</a:t>
-            </a:r>
-          </a:p>
-        </p:txBody>
-      </p:sp>
-      <p:sp>
-        <p:nvSpPr>
-          <p:cNvPr id="6" name="Rounded Rectangle 5"/>
+              <a:t>Three Core Academic Opportunities</a:t>
+            </a:r>
+          </a:p>
+        </p:txBody>
+      </p:sp>
+      <p:sp>
+        <p:nvSpPr>
+          <p:cNvPr id="4" name="!!Card_1"/>
           <p:cNvSpPr/>
           <p:nvPr/>
         </p:nvSpPr>
         <p:spPr>
           <a:xfrm>
-            <a:off x="731520" y="2011680"/>
-            <a:ext cx="3413455" cy="3840480"/>
+            <a:off x="731520" y="1645920"/>
+            <a:ext cx="3291840" cy="4114800"/>
           </a:xfrm>
           <a:prstGeom prst="roundRect">
             <a:avLst/>
           </a:prstGeom>
           <a:solidFill>
-            <a:srgbClr val="131F37"/>
+            <a:srgbClr val="131D32"/>
           </a:solidFill>
           <a:ln w="19050">
             <a:solidFill>
-              <a:srgbClr val="22D3EE"/>
+              <a:srgbClr val="00E5FF"/>
             </a:solidFill>
           </a:ln>
         </p:spPr>
@@ -6435,83 +5794,54 @@
           </a:fontRef>
         </p:style>
         <p:txBody>
-          <a:bodyPr rtlCol="0" anchor="ctr"/>
-          <a:lstStyle/>
-          <a:p>
-            <a:pPr algn="ctr"/>
-          </a:p>
-        </p:txBody>
-      </p:sp>
-      <p:sp>
-        <p:nvSpPr>
-          <p:cNvPr id="7" name="TextBox 6"/>
-          <p:cNvSpPr txBox="1"/>
-          <p:nvPr/>
-        </p:nvSpPr>
-        <p:spPr>
-          <a:xfrm>
-            <a:off x="914400" y="2286000"/>
-            <a:ext cx="3047695" cy="3200400"/>
-          </a:xfrm>
-          <a:prstGeom prst="rect">
-            <a:avLst/>
-          </a:prstGeom>
-          <a:noFill/>
-        </p:spPr>
-        <p:txBody>
-          <a:bodyPr wrap="square">
-            <a:spAutoFit/>
-          </a:bodyPr>
-          <a:lstStyle/>
+          <a:bodyPr rtlCol="0" anchor="ctr" wrap="square"/>
+          <a:lstStyle/>
+          <a:p>
+            <a:pPr algn="ctr">
+              <a:defRPr b="1" sz="1500">
+                <a:solidFill>
+                  <a:srgbClr val="00E5FF"/>
+                </a:solidFill>
+              </a:defRPr>
+            </a:pPr>
+            <a:r>
+              <a:t>1. Personalized Tutoring</a:t>
+            </a:r>
+          </a:p>
           <a:p>
             <a:pPr>
-              <a:defRPr sz="4800" b="1">
-                <a:solidFill>
-                  <a:srgbClr val="22D3EE"/>
+              <a:defRPr sz="1100">
+                <a:solidFill>
+                  <a:srgbClr val="F0F0F0"/>
                 </a:solidFill>
               </a:defRPr>
             </a:pPr>
             <a:r>
-              <a:t>74%</a:t>
-            </a:r>
-          </a:p>
-          <a:p>
-            <a:pPr>
-              <a:spcBef>
-                <a:spcPts val="1600"/>
-              </a:spcBef>
-              <a:defRPr sz="1600">
-                <a:solidFill>
-                  <a:srgbClr val="F8FAFC"/>
-                </a:solidFill>
-              </a:defRPr>
-            </a:pPr>
-            <a:r>
-              <a:t>Tertiary students reporting weekly AI tool usage for coursework</a:t>
-            </a:r>
-          </a:p>
-        </p:txBody>
-      </p:sp>
-      <p:sp>
-        <p:nvSpPr>
-          <p:cNvPr id="8" name="Rounded Rectangle 7"/>
+              <a:t>Customized pacing and adaptive scaffolds designed around individual student neurodiversity and aptitude.</a:t>
+            </a:r>
+          </a:p>
+        </p:txBody>
+      </p:sp>
+      <p:sp>
+        <p:nvSpPr>
+          <p:cNvPr id="5" name="!!Card_2"/>
           <p:cNvSpPr/>
           <p:nvPr/>
         </p:nvSpPr>
         <p:spPr>
           <a:xfrm>
-            <a:off x="4389120" y="2011680"/>
-            <a:ext cx="3413455" cy="3840480"/>
+            <a:off x="4389120" y="1645920"/>
+            <a:ext cx="3291840" cy="4114800"/>
           </a:xfrm>
           <a:prstGeom prst="roundRect">
             <a:avLst/>
           </a:prstGeom>
           <a:solidFill>
-            <a:srgbClr val="131F37"/>
+            <a:srgbClr val="131D32"/>
           </a:solidFill>
           <a:ln w="19050">
             <a:solidFill>
-              <a:srgbClr val="22D3EE"/>
+              <a:srgbClr val="00E5FF"/>
             </a:solidFill>
           </a:ln>
         </p:spPr>
@@ -6530,83 +5860,54 @@
           </a:fontRef>
         </p:style>
         <p:txBody>
-          <a:bodyPr rtlCol="0" anchor="ctr"/>
-          <a:lstStyle/>
-          <a:p>
-            <a:pPr algn="ctr"/>
-          </a:p>
-        </p:txBody>
-      </p:sp>
-      <p:sp>
-        <p:nvSpPr>
-          <p:cNvPr id="9" name="TextBox 8"/>
-          <p:cNvSpPr txBox="1"/>
-          <p:nvPr/>
-        </p:nvSpPr>
-        <p:spPr>
-          <a:xfrm>
-            <a:off x="4572000" y="2286000"/>
-            <a:ext cx="3047695" cy="3200400"/>
-          </a:xfrm>
-          <a:prstGeom prst="rect">
-            <a:avLst/>
-          </a:prstGeom>
-          <a:noFill/>
-        </p:spPr>
-        <p:txBody>
-          <a:bodyPr wrap="square">
-            <a:spAutoFit/>
-          </a:bodyPr>
-          <a:lstStyle/>
+          <a:bodyPr rtlCol="0" anchor="ctr" wrap="square"/>
+          <a:lstStyle/>
+          <a:p>
+            <a:pPr algn="ctr">
+              <a:defRPr b="1" sz="1500">
+                <a:solidFill>
+                  <a:srgbClr val="00E5FF"/>
+                </a:solidFill>
+              </a:defRPr>
+            </a:pPr>
+            <a:r>
+              <a:t>2. Faculty Workflow Automation</a:t>
+            </a:r>
+          </a:p>
           <a:p>
             <a:pPr>
-              <a:defRPr sz="4800" b="1">
-                <a:solidFill>
-                  <a:srgbClr val="22D3EE"/>
+              <a:defRPr sz="1100">
+                <a:solidFill>
+                  <a:srgbClr val="F0F0F0"/>
                 </a:solidFill>
               </a:defRPr>
             </a:pPr>
             <a:r>
-              <a:t>3.5x</a:t>
-            </a:r>
-          </a:p>
-          <a:p>
-            <a:pPr>
-              <a:spcBef>
-                <a:spcPts val="1600"/>
-              </a:spcBef>
-              <a:defRPr sz="1600">
-                <a:solidFill>
-                  <a:srgbClr val="F8FAFC"/>
-                </a:solidFill>
-              </a:defRPr>
-            </a:pPr>
-            <a:r>
-              <a:t>Acceleration in initial code scaffolding and debugging velocity</a:t>
-            </a:r>
-          </a:p>
-        </p:txBody>
-      </p:sp>
-      <p:sp>
-        <p:nvSpPr>
-          <p:cNvPr id="10" name="Rounded Rectangle 9"/>
+              <a:t>Automated routine grading of quizzes and diagnostic reports, liberating teachers for direct 1-on-1 mentorship.</a:t>
+            </a:r>
+          </a:p>
+        </p:txBody>
+      </p:sp>
+      <p:sp>
+        <p:nvSpPr>
+          <p:cNvPr id="6" name="!!Card_3"/>
           <p:cNvSpPr/>
           <p:nvPr/>
         </p:nvSpPr>
         <p:spPr>
           <a:xfrm>
-            <a:off x="8046720" y="2011680"/>
-            <a:ext cx="3413455" cy="3840480"/>
+            <a:off x="8046720" y="1645920"/>
+            <a:ext cx="3291840" cy="4114800"/>
           </a:xfrm>
           <a:prstGeom prst="roundRect">
             <a:avLst/>
           </a:prstGeom>
           <a:solidFill>
-            <a:srgbClr val="131F37"/>
+            <a:srgbClr val="131D32"/>
           </a:solidFill>
           <a:ln w="19050">
             <a:solidFill>
-              <a:srgbClr val="22D3EE"/>
+              <a:srgbClr val="00E5FF"/>
             </a:solidFill>
           </a:ln>
         </p:spPr>
@@ -6625,59 +5926,30 @@
           </a:fontRef>
         </p:style>
         <p:txBody>
-          <a:bodyPr rtlCol="0" anchor="ctr"/>
-          <a:lstStyle/>
-          <a:p>
-            <a:pPr algn="ctr"/>
-          </a:p>
-        </p:txBody>
-      </p:sp>
-      <p:sp>
-        <p:nvSpPr>
-          <p:cNvPr id="11" name="TextBox 10"/>
-          <p:cNvSpPr txBox="1"/>
-          <p:nvPr/>
-        </p:nvSpPr>
-        <p:spPr>
-          <a:xfrm>
-            <a:off x="8229600" y="2286000"/>
-            <a:ext cx="3047695" cy="3200400"/>
-          </a:xfrm>
-          <a:prstGeom prst="rect">
-            <a:avLst/>
-          </a:prstGeom>
-          <a:noFill/>
-        </p:spPr>
-        <p:txBody>
-          <a:bodyPr wrap="square">
-            <a:spAutoFit/>
-          </a:bodyPr>
-          <a:lstStyle/>
+          <a:bodyPr rtlCol="0" anchor="ctr" wrap="square"/>
+          <a:lstStyle/>
+          <a:p>
+            <a:pPr algn="ctr">
+              <a:defRPr b="1" sz="1500">
+                <a:solidFill>
+                  <a:srgbClr val="00E5FF"/>
+                </a:solidFill>
+              </a:defRPr>
+            </a:pPr>
+            <a:r>
+              <a:t>3. Multilingual Accessibility</a:t>
+            </a:r>
+          </a:p>
           <a:p>
             <a:pPr>
-              <a:defRPr sz="4800" b="1">
-                <a:solidFill>
-                  <a:srgbClr val="22D3EE"/>
+              <a:defRPr sz="1100">
+                <a:solidFill>
+                  <a:srgbClr val="F0F0F0"/>
                 </a:solidFill>
               </a:defRPr>
             </a:pPr>
             <a:r>
-              <a:t>68%</a:t>
-            </a:r>
-          </a:p>
-          <a:p>
-            <a:pPr>
-              <a:spcBef>
-                <a:spcPts val="1600"/>
-              </a:spcBef>
-              <a:defRPr sz="1600">
-                <a:solidFill>
-                  <a:srgbClr val="F8FAFC"/>
-                </a:solidFill>
-              </a:defRPr>
-            </a:pPr>
-            <a:r>
-              <a:t>Higher education instructors actively updating syllabus policies</a:t>
+              <a:t>Real-time speech-to-text, dialect translation, and assistive reading engines for equitable classroom access.</a:t>
             </a:r>
           </a:p>
         </p:txBody>
@@ -6694,7 +5966,7 @@
 </file>
 
 <file path=ppt/slides/slide6.xml><?xml version="1.0" encoding="utf-8"?>
-<p:sld xmlns:a="http://schemas.openxmlformats.org/drawingml/2006/main" xmlns:p="http://schemas.openxmlformats.org/presentationml/2006/main" xmlns:r="http://schemas.openxmlformats.org/officeDocument/2006/relationships">
+<p:sld xmlns:p14="http://schemas.microsoft.com/office/powerpoint/2010/main" xmlns:a="http://schemas.openxmlformats.org/drawingml/2006/main" xmlns:p="http://schemas.openxmlformats.org/presentationml/2006/main" xmlns:r="http://schemas.openxmlformats.org/officeDocument/2006/relationships">
   <p:cSld>
     <p:spTree>
       <p:nvGrpSpPr>
@@ -6754,8 +6026,8 @@
         </p:nvSpPr>
         <p:spPr>
           <a:xfrm>
-            <a:off x="731520" y="365760"/>
-            <a:ext cx="10058400" cy="365760"/>
+            <a:off x="731520" y="457200"/>
+            <a:ext cx="10698480" cy="1005840"/>
           </a:xfrm>
           <a:prstGeom prst="rect">
             <a:avLst/>
@@ -6763,7 +6035,7 @@
           <a:noFill/>
         </p:spPr>
         <p:txBody>
-          <a:bodyPr wrap="none">
+          <a:bodyPr wrap="square">
             <a:spAutoFit/>
           </a:bodyPr>
           <a:lstStyle/>
@@ -6771,106 +6043,72 @@
             <a:pPr>
               <a:defRPr sz="1100" b="1">
                 <a:solidFill>
-                  <a:srgbClr val="22D3EE"/>
+                  <a:srgbClr val="00E5FF"/>
                 </a:solidFill>
               </a:defRPr>
             </a:pPr>
             <a:r>
-              <a:t>STRATEGIC FRAMEWORK</a:t>
-            </a:r>
-          </a:p>
-        </p:txBody>
-      </p:sp>
-      <p:sp>
-        <p:nvSpPr>
-          <p:cNvPr id="4" name="TextBox 3"/>
-          <p:cNvSpPr txBox="1"/>
+              <a:t>VULNERABILITY ANALYSIS</a:t>
+            </a:r>
+          </a:p>
+          <a:p>
+            <a:pPr>
+              <a:defRPr sz="2400" b="1">
+                <a:solidFill>
+                  <a:srgbClr val="FFFFFF"/>
+                </a:solidFill>
+              </a:defRPr>
+            </a:pPr>
+            <a:r>
+              <a:t>Academic Integrity &amp; Ethical Risks</a:t>
+            </a:r>
+          </a:p>
+        </p:txBody>
+      </p:sp>
+      <p:pic>
+        <p:nvPicPr>
+          <p:cNvPr id="4" name="!!Content_Image" descr="ai_integrity.png"/>
+          <p:cNvPicPr>
+            <a:picLocks noChangeAspect="1"/>
+          </p:cNvPicPr>
           <p:nvPr/>
-        </p:nvSpPr>
-        <p:spPr>
-          <a:xfrm>
-            <a:off x="731520" y="685800"/>
-            <a:ext cx="10515600" cy="731520"/>
+        </p:nvPicPr>
+        <p:blipFill>
+          <a:blip r:embed="rId2"/>
+          <a:stretch>
+            <a:fillRect/>
+          </a:stretch>
+        </p:blipFill>
+        <p:spPr>
+          <a:xfrm>
+            <a:off x="731520" y="1645920"/>
+            <a:ext cx="5029200" cy="4389120"/>
           </a:xfrm>
           <a:prstGeom prst="rect">
             <a:avLst/>
           </a:prstGeom>
-          <a:noFill/>
-        </p:spPr>
-        <p:txBody>
-          <a:bodyPr wrap="none">
-            <a:spAutoFit/>
-          </a:bodyPr>
-          <a:lstStyle/>
-          <a:p>
-            <a:pPr>
-              <a:defRPr sz="2600" b="1">
-                <a:solidFill>
-                  <a:srgbClr val="F8FAFC"/>
-                </a:solidFill>
-              </a:defRPr>
-            </a:pPr>
-            <a:r>
-              <a:t>Three Pillars of Academic AI Value</a:t>
-            </a:r>
-          </a:p>
-        </p:txBody>
-      </p:sp>
-      <p:sp>
-        <p:nvSpPr>
-          <p:cNvPr id="5" name="TextBox 4"/>
-          <p:cNvSpPr txBox="1"/>
-          <p:nvPr/>
-        </p:nvSpPr>
-        <p:spPr>
-          <a:xfrm>
-            <a:off x="731520" y="6400800"/>
-            <a:ext cx="10728655" cy="320040"/>
-          </a:xfrm>
-          <a:prstGeom prst="rect">
-            <a:avLst/>
-          </a:prstGeom>
-          <a:noFill/>
-        </p:spPr>
-        <p:txBody>
-          <a:bodyPr wrap="none">
-            <a:spAutoFit/>
-          </a:bodyPr>
-          <a:lstStyle/>
-          <a:p>
-            <a:pPr>
-              <a:defRPr sz="900">
-                <a:solidFill>
-                  <a:srgbClr val="94A3B8"/>
-                </a:solidFill>
-              </a:defRPr>
-            </a:pPr>
-            <a:r>
-              <a:t>STI West Negros University  •  Jhon Paulo V. Gascon  •  Slide 6 of 11</a:t>
-            </a:r>
-          </a:p>
-        </p:txBody>
-      </p:sp>
-      <p:sp>
-        <p:nvSpPr>
-          <p:cNvPr id="6" name="Rounded Rectangle 5"/>
+        </p:spPr>
+      </p:pic>
+      <p:sp>
+        <p:nvSpPr>
+          <p:cNvPr id="5" name="!!Card_1"/>
           <p:cNvSpPr/>
           <p:nvPr/>
         </p:nvSpPr>
         <p:spPr>
           <a:xfrm>
-            <a:off x="731520" y="2011680"/>
-            <a:ext cx="3413455" cy="3840480"/>
+            <a:off x="6126480" y="1645920"/>
+            <a:ext cx="5303520" cy="1280160"/>
           </a:xfrm>
           <a:prstGeom prst="roundRect">
             <a:avLst/>
           </a:prstGeom>
           <a:solidFill>
-            <a:srgbClr val="131F37"/>
+            <a:srgbClr val="131D32"/>
           </a:solidFill>
-          <a:ln w="19050">
+          <a:ln w="12700">
             <a:solidFill>
-              <a:srgbClr val="7C3AED"/>
+              <a:srgbClr val="00E5FF"/>
             </a:solidFill>
           </a:ln>
         </p:spPr>
@@ -6889,83 +6127,54 @@
           </a:fontRef>
         </p:style>
         <p:txBody>
-          <a:bodyPr rtlCol="0" anchor="ctr"/>
-          <a:lstStyle/>
-          <a:p>
-            <a:pPr algn="ctr"/>
-          </a:p>
-        </p:txBody>
-      </p:sp>
-      <p:sp>
-        <p:nvSpPr>
-          <p:cNvPr id="7" name="TextBox 6"/>
-          <p:cNvSpPr txBox="1"/>
-          <p:nvPr/>
-        </p:nvSpPr>
-        <p:spPr>
-          <a:xfrm>
-            <a:off x="914400" y="2286000"/>
-            <a:ext cx="3047695" cy="3200400"/>
-          </a:xfrm>
-          <a:prstGeom prst="rect">
-            <a:avLst/>
-          </a:prstGeom>
-          <a:noFill/>
-        </p:spPr>
-        <p:txBody>
-          <a:bodyPr wrap="square">
-            <a:spAutoFit/>
-          </a:bodyPr>
-          <a:lstStyle/>
+          <a:bodyPr rtlCol="0" anchor="ctr" wrap="square"/>
+          <a:lstStyle/>
+          <a:p>
+            <a:pPr algn="ctr">
+              <a:defRPr b="1" sz="1300">
+                <a:solidFill>
+                  <a:srgbClr val="FFFFFF"/>
+                </a:solidFill>
+              </a:defRPr>
+            </a:pPr>
+            <a:r>
+              <a:t>Cognitive Atrophy Hazard</a:t>
+            </a:r>
+          </a:p>
           <a:p>
             <a:pPr>
-              <a:defRPr sz="2000" b="1">
-                <a:solidFill>
-                  <a:srgbClr val="22D3EE"/>
+              <a:defRPr sz="1050">
+                <a:solidFill>
+                  <a:srgbClr val="DCE6F2"/>
                 </a:solidFill>
               </a:defRPr>
             </a:pPr>
             <a:r>
-              <a:t>Personalized Tutoring</a:t>
-            </a:r>
-          </a:p>
-          <a:p>
-            <a:pPr>
-              <a:spcBef>
-                <a:spcPts val="1400"/>
-              </a:spcBef>
-              <a:defRPr sz="1400">
-                <a:solidFill>
-                  <a:srgbClr val="F8FAFC"/>
-                </a:solidFill>
-              </a:defRPr>
-            </a:pPr>
-            <a:r>
-              <a:t>Adaptive learning systems that explain complex algorithms step-by-step.</a:t>
-            </a:r>
-          </a:p>
-        </p:txBody>
-      </p:sp>
-      <p:sp>
-        <p:nvSpPr>
-          <p:cNvPr id="8" name="Rounded Rectangle 7"/>
+              <a:t>Over-reliance on automated code completion impairs baseline algorithmic problem-solving.</a:t>
+            </a:r>
+          </a:p>
+        </p:txBody>
+      </p:sp>
+      <p:sp>
+        <p:nvSpPr>
+          <p:cNvPr id="6" name="!!Card_2"/>
           <p:cNvSpPr/>
           <p:nvPr/>
         </p:nvSpPr>
         <p:spPr>
           <a:xfrm>
-            <a:off x="4389120" y="2011680"/>
-            <a:ext cx="3413455" cy="3840480"/>
+            <a:off x="6126480" y="3108960"/>
+            <a:ext cx="5303520" cy="1280160"/>
           </a:xfrm>
           <a:prstGeom prst="roundRect">
             <a:avLst/>
           </a:prstGeom>
           <a:solidFill>
-            <a:srgbClr val="131F37"/>
+            <a:srgbClr val="131D32"/>
           </a:solidFill>
-          <a:ln w="19050">
+          <a:ln w="12700">
             <a:solidFill>
-              <a:srgbClr val="7C3AED"/>
+              <a:srgbClr val="00E5FF"/>
             </a:solidFill>
           </a:ln>
         </p:spPr>
@@ -6984,83 +6193,54 @@
           </a:fontRef>
         </p:style>
         <p:txBody>
-          <a:bodyPr rtlCol="0" anchor="ctr"/>
-          <a:lstStyle/>
-          <a:p>
-            <a:pPr algn="ctr"/>
-          </a:p>
-        </p:txBody>
-      </p:sp>
-      <p:sp>
-        <p:nvSpPr>
-          <p:cNvPr id="9" name="TextBox 8"/>
-          <p:cNvSpPr txBox="1"/>
-          <p:nvPr/>
-        </p:nvSpPr>
-        <p:spPr>
-          <a:xfrm>
-            <a:off x="4572000" y="2286000"/>
-            <a:ext cx="3047695" cy="3200400"/>
-          </a:xfrm>
-          <a:prstGeom prst="rect">
-            <a:avLst/>
-          </a:prstGeom>
-          <a:noFill/>
-        </p:spPr>
-        <p:txBody>
-          <a:bodyPr wrap="square">
-            <a:spAutoFit/>
-          </a:bodyPr>
-          <a:lstStyle/>
+          <a:bodyPr rtlCol="0" anchor="ctr" wrap="square"/>
+          <a:lstStyle/>
+          <a:p>
+            <a:pPr algn="ctr">
+              <a:defRPr b="1" sz="1300">
+                <a:solidFill>
+                  <a:srgbClr val="FFFFFF"/>
+                </a:solidFill>
+              </a:defRPr>
+            </a:pPr>
+            <a:r>
+              <a:t>Algorithmic Hallucinations</a:t>
+            </a:r>
+          </a:p>
           <a:p>
             <a:pPr>
-              <a:defRPr sz="2000" b="1">
-                <a:solidFill>
-                  <a:srgbClr val="22D3EE"/>
+              <a:defRPr sz="1050">
+                <a:solidFill>
+                  <a:srgbClr val="DCE6F2"/>
                 </a:solidFill>
               </a:defRPr>
             </a:pPr>
             <a:r>
-              <a:t>Accelerated Ideation</a:t>
-            </a:r>
-          </a:p>
-          <a:p>
-            <a:pPr>
-              <a:spcBef>
-                <a:spcPts val="1400"/>
-              </a:spcBef>
-              <a:defRPr sz="1400">
-                <a:solidFill>
-                  <a:srgbClr val="F8FAFC"/>
-                </a:solidFill>
-              </a:defRPr>
-            </a:pPr>
-            <a:r>
-              <a:t>Instant generation of alternative algorithmic approaches and edge cases.</a:t>
-            </a:r>
-          </a:p>
-        </p:txBody>
-      </p:sp>
-      <p:sp>
-        <p:nvSpPr>
-          <p:cNvPr id="10" name="Rounded Rectangle 9"/>
+              <a:t>Generative models produce convincingly worded false citations and inaccurate historical facts.</a:t>
+            </a:r>
+          </a:p>
+        </p:txBody>
+      </p:sp>
+      <p:sp>
+        <p:nvSpPr>
+          <p:cNvPr id="7" name="!!Card_3"/>
           <p:cNvSpPr/>
           <p:nvPr/>
         </p:nvSpPr>
         <p:spPr>
           <a:xfrm>
-            <a:off x="8046720" y="2011680"/>
-            <a:ext cx="3413455" cy="3840480"/>
+            <a:off x="6126480" y="4572000"/>
+            <a:ext cx="5303520" cy="1280160"/>
           </a:xfrm>
           <a:prstGeom prst="roundRect">
             <a:avLst/>
           </a:prstGeom>
           <a:solidFill>
-            <a:srgbClr val="131F37"/>
+            <a:srgbClr val="131D32"/>
           </a:solidFill>
-          <a:ln w="19050">
+          <a:ln w="12700">
             <a:solidFill>
-              <a:srgbClr val="7C3AED"/>
+              <a:srgbClr val="00E5FF"/>
             </a:solidFill>
           </a:ln>
         </p:spPr>
@@ -7079,59 +6259,30 @@
           </a:fontRef>
         </p:style>
         <p:txBody>
-          <a:bodyPr rtlCol="0" anchor="ctr"/>
-          <a:lstStyle/>
-          <a:p>
-            <a:pPr algn="ctr"/>
-          </a:p>
-        </p:txBody>
-      </p:sp>
-      <p:sp>
-        <p:nvSpPr>
-          <p:cNvPr id="11" name="TextBox 10"/>
-          <p:cNvSpPr txBox="1"/>
-          <p:nvPr/>
-        </p:nvSpPr>
-        <p:spPr>
-          <a:xfrm>
-            <a:off x="8229600" y="2286000"/>
-            <a:ext cx="3047695" cy="3200400"/>
-          </a:xfrm>
-          <a:prstGeom prst="rect">
-            <a:avLst/>
-          </a:prstGeom>
-          <a:noFill/>
-        </p:spPr>
-        <p:txBody>
-          <a:bodyPr wrap="square">
-            <a:spAutoFit/>
-          </a:bodyPr>
-          <a:lstStyle/>
+          <a:bodyPr rtlCol="0" anchor="ctr" wrap="square"/>
+          <a:lstStyle/>
+          <a:p>
+            <a:pPr algn="ctr">
+              <a:defRPr b="1" sz="1300">
+                <a:solidFill>
+                  <a:srgbClr val="FFFFFF"/>
+                </a:solidFill>
+              </a:defRPr>
+            </a:pPr>
+            <a:r>
+              <a:t>Data Privacy &amp; IP Exposure</a:t>
+            </a:r>
+          </a:p>
           <a:p>
             <a:pPr>
-              <a:defRPr sz="2000" b="1">
-                <a:solidFill>
-                  <a:srgbClr val="22D3EE"/>
+              <a:defRPr sz="1050">
+                <a:solidFill>
+                  <a:srgbClr val="DCE6F2"/>
                 </a:solidFill>
               </a:defRPr>
             </a:pPr>
             <a:r>
-              <a:t>Accessibility Support</a:t>
-            </a:r>
-          </a:p>
-          <a:p>
-            <a:pPr>
-              <a:spcBef>
-                <a:spcPts val="1400"/>
-              </a:spcBef>
-              <a:defRPr sz="1400">
-                <a:solidFill>
-                  <a:srgbClr val="F8FAFC"/>
-                </a:solidFill>
-              </a:defRPr>
-            </a:pPr>
-            <a:r>
-              <a:t>Real-time speech-to-text, translation, and automated visual transcription.</a:t>
+              <a:t>Uploading proprietary university research into commercial model clouds creates serious data leaks.</a:t>
             </a:r>
           </a:p>
         </p:txBody>
@@ -7148,7 +6299,7 @@
 </file>
 
 <file path=ppt/slides/slide7.xml><?xml version="1.0" encoding="utf-8"?>
-<p:sld xmlns:a="http://schemas.openxmlformats.org/drawingml/2006/main" xmlns:p="http://schemas.openxmlformats.org/presentationml/2006/main" xmlns:r="http://schemas.openxmlformats.org/officeDocument/2006/relationships">
+<p:sld xmlns:p14="http://schemas.microsoft.com/office/powerpoint/2010/main" xmlns:a="http://schemas.openxmlformats.org/drawingml/2006/main" xmlns:p="http://schemas.openxmlformats.org/presentationml/2006/main" xmlns:r="http://schemas.openxmlformats.org/officeDocument/2006/relationships">
   <p:cSld>
     <p:spTree>
       <p:nvGrpSpPr>
@@ -7200,16 +6351,40 @@
           </a:p>
         </p:txBody>
       </p:sp>
-      <p:sp>
-        <p:nvSpPr>
-          <p:cNvPr id="3" name="TextBox 2"/>
+      <p:pic>
+        <p:nvPicPr>
+          <p:cNvPr id="3" name="!!Hero_Image" descr="ai_policy.png"/>
+          <p:cNvPicPr>
+            <a:picLocks noChangeAspect="1"/>
+          </p:cNvPicPr>
+          <p:nvPr/>
+        </p:nvPicPr>
+        <p:blipFill>
+          <a:blip r:embed="rId2"/>
+          <a:stretch>
+            <a:fillRect/>
+          </a:stretch>
+        </p:blipFill>
+        <p:spPr>
+          <a:xfrm>
+            <a:off x="731520" y="914400"/>
+            <a:ext cx="5029200" cy="5029200"/>
+          </a:xfrm>
+          <a:prstGeom prst="rect">
+            <a:avLst/>
+          </a:prstGeom>
+        </p:spPr>
+      </p:pic>
+      <p:sp>
+        <p:nvSpPr>
+          <p:cNvPr id="4" name="!!Title_Card"/>
           <p:cNvSpPr txBox="1"/>
           <p:nvPr/>
         </p:nvSpPr>
         <p:spPr>
           <a:xfrm>
-            <a:off x="731520" y="365760"/>
-            <a:ext cx="10058400" cy="365760"/>
+            <a:off x="6217920" y="2011680"/>
+            <a:ext cx="5303520" cy="3200400"/>
           </a:xfrm>
           <a:prstGeom prst="rect">
             <a:avLst/>
@@ -7217,115 +6392,85 @@
           <a:noFill/>
         </p:spPr>
         <p:txBody>
-          <a:bodyPr wrap="none">
+          <a:bodyPr wrap="square">
             <a:spAutoFit/>
           </a:bodyPr>
           <a:lstStyle/>
           <a:p>
             <a:pPr>
-              <a:defRPr sz="1100" b="1">
-                <a:solidFill>
-                  <a:srgbClr val="22D3EE"/>
+              <a:defRPr sz="3200" b="1">
+                <a:solidFill>
+                  <a:srgbClr val="FFFFFF"/>
                 </a:solidFill>
               </a:defRPr>
             </a:pPr>
             <a:r>
-              <a:t>COMPARATIVE ANALYSIS</a:t>
-            </a:r>
-          </a:p>
-        </p:txBody>
-      </p:sp>
-      <p:sp>
-        <p:nvSpPr>
-          <p:cNvPr id="4" name="TextBox 3"/>
-          <p:cNvSpPr txBox="1"/>
+              <a:t>Institutional AI Policy</a:t>
+            </a:r>
+          </a:p>
+          <a:p>
+            <a:pPr>
+              <a:defRPr sz="1600">
+                <a:solidFill>
+                  <a:srgbClr val="00E5FF"/>
+                </a:solidFill>
+              </a:defRPr>
+            </a:pPr>
+            <a:r>
+              <a:t>Constructing Ethical Governance Frameworks for Higher Education</a:t>
+            </a:r>
+          </a:p>
+        </p:txBody>
+      </p:sp>
+    </p:spTree>
+  </p:cSld>
+  <p:clrMapOvr>
+    <a:masterClrMapping/>
+  </p:clrMapOvr>
+  <mc:AlternateContent xmlns:mc="http://schemas.openxmlformats.org/markup-compatibility/2006">
+    <mc:Choice xmlns:p159="http://schemas.microsoft.com/office/powerpoint/2015/09/main" Requires="p159">
+      <p:transition spd="slow" p14:dur="1500">
+        <p159:morph option="byObject"/>
+      </p:transition>
+    </mc:Choice>
+    <mc:Fallback>
+      <p:transition spd="slow">
+        <p:fade/>
+      </p:transition>
+    </mc:Fallback>
+  </mc:AlternateContent>
+</p:sld>
+</file>
+
+<file path=ppt/slides/slide8.xml><?xml version="1.0" encoding="utf-8"?>
+<p:sld xmlns:p14="http://schemas.microsoft.com/office/powerpoint/2010/main" xmlns:a="http://schemas.openxmlformats.org/drawingml/2006/main" xmlns:p="http://schemas.openxmlformats.org/presentationml/2006/main" xmlns:r="http://schemas.openxmlformats.org/officeDocument/2006/relationships">
+  <p:cSld>
+    <p:spTree>
+      <p:nvGrpSpPr>
+        <p:cNvPr id="1" name=""/>
+        <p:cNvGrpSpPr/>
+        <p:nvPr/>
+      </p:nvGrpSpPr>
+      <p:grpSpPr/>
+      <p:sp>
+        <p:nvSpPr>
+          <p:cNvPr id="2" name="Rectangle 1"/>
+          <p:cNvSpPr/>
           <p:nvPr/>
         </p:nvSpPr>
         <p:spPr>
           <a:xfrm>
-            <a:off x="731520" y="685800"/>
-            <a:ext cx="10515600" cy="731520"/>
+            <a:off x="0" y="0"/>
+            <a:ext cx="12191695" cy="6858000"/>
           </a:xfrm>
           <a:prstGeom prst="rect">
             <a:avLst/>
           </a:prstGeom>
-          <a:noFill/>
-        </p:spPr>
-        <p:txBody>
-          <a:bodyPr wrap="none">
-            <a:spAutoFit/>
-          </a:bodyPr>
-          <a:lstStyle/>
-          <a:p>
-            <a:pPr>
-              <a:defRPr sz="2600" b="1">
-                <a:solidFill>
-                  <a:srgbClr val="F8FAFC"/>
-                </a:solidFill>
-              </a:defRPr>
-            </a:pPr>
-            <a:r>
-              <a:t>Balancing Innovation with Cognitive Hazards</a:t>
-            </a:r>
-          </a:p>
-        </p:txBody>
-      </p:sp>
-      <p:sp>
-        <p:nvSpPr>
-          <p:cNvPr id="5" name="TextBox 4"/>
-          <p:cNvSpPr txBox="1"/>
-          <p:nvPr/>
-        </p:nvSpPr>
-        <p:spPr>
-          <a:xfrm>
-            <a:off x="731520" y="6400800"/>
-            <a:ext cx="10728655" cy="320040"/>
-          </a:xfrm>
-          <a:prstGeom prst="rect">
-            <a:avLst/>
-          </a:prstGeom>
-          <a:noFill/>
-        </p:spPr>
-        <p:txBody>
-          <a:bodyPr wrap="none">
-            <a:spAutoFit/>
-          </a:bodyPr>
-          <a:lstStyle/>
-          <a:p>
-            <a:pPr>
-              <a:defRPr sz="900">
-                <a:solidFill>
-                  <a:srgbClr val="94A3B8"/>
-                </a:solidFill>
-              </a:defRPr>
-            </a:pPr>
-            <a:r>
-              <a:t>STI West Negros University  •  Jhon Paulo V. Gascon  •  Slide 7 of 11</a:t>
-            </a:r>
-          </a:p>
-        </p:txBody>
-      </p:sp>
-      <p:sp>
-        <p:nvSpPr>
-          <p:cNvPr id="6" name="Rounded Rectangle 5"/>
-          <p:cNvSpPr/>
-          <p:nvPr/>
-        </p:nvSpPr>
-        <p:spPr>
-          <a:xfrm>
-            <a:off x="731520" y="1828800"/>
-            <a:ext cx="5212080" cy="4114800"/>
-          </a:xfrm>
-          <a:prstGeom prst="roundRect">
-            <a:avLst/>
-          </a:prstGeom>
           <a:solidFill>
-            <a:srgbClr val="131F37"/>
+            <a:srgbClr val="0B1220"/>
           </a:solidFill>
-          <a:ln w="25400">
-            <a:solidFill>
-              <a:srgbClr val="22D3EE"/>
-            </a:solidFill>
+          <a:ln>
+            <a:noFill/>
           </a:ln>
         </p:spPr>
         <p:style>
@@ -7352,14 +6497,14 @@
       </p:sp>
       <p:sp>
         <p:nvSpPr>
-          <p:cNvPr id="7" name="TextBox 6"/>
+          <p:cNvPr id="3" name="TextBox 2"/>
           <p:cNvSpPr txBox="1"/>
           <p:nvPr/>
         </p:nvSpPr>
         <p:spPr>
           <a:xfrm>
-            <a:off x="914400" y="2011680"/>
-            <a:ext cx="4846320" cy="3657600"/>
+            <a:off x="731520" y="457200"/>
+            <a:ext cx="10698480" cy="1005840"/>
           </a:xfrm>
           <a:prstGeom prst="rect">
             <a:avLst/>
@@ -7373,98 +6518,74 @@
           <a:lstStyle/>
           <a:p>
             <a:pPr>
-              <a:defRPr sz="1800" b="1">
-                <a:solidFill>
-                  <a:srgbClr val="22D3EE"/>
+              <a:defRPr sz="1100" b="1">
+                <a:solidFill>
+                  <a:srgbClr val="00E5FF"/>
                 </a:solidFill>
               </a:defRPr>
             </a:pPr>
             <a:r>
-              <a:t>Productive Augmentation</a:t>
+              <a:t>INSTITUTIONAL ACTION</a:t>
             </a:r>
           </a:p>
           <a:p>
             <a:pPr>
-              <a:spcBef>
-                <a:spcPts val="800"/>
-              </a:spcBef>
-              <a:defRPr sz="1300">
-                <a:solidFill>
-                  <a:srgbClr val="F8FAFC"/>
+              <a:defRPr sz="2400" b="1">
+                <a:solidFill>
+                  <a:srgbClr val="FFFFFF"/>
                 </a:solidFill>
               </a:defRPr>
             </a:pPr>
             <a:r>
-              <a:t>•  Uses AI to understand underlying concepts</a:t>
-            </a:r>
-          </a:p>
-          <a:p>
-            <a:pPr>
-              <a:spcBef>
-                <a:spcPts val="800"/>
-              </a:spcBef>
-              <a:defRPr sz="1300">
-                <a:solidFill>
-                  <a:srgbClr val="F8FAFC"/>
-                </a:solidFill>
-              </a:defRPr>
-            </a:pPr>
-            <a:r>
-              <a:t>•  Leverages tools to debug syntax errors</a:t>
-            </a:r>
-          </a:p>
-          <a:p>
-            <a:pPr>
-              <a:spcBef>
-                <a:spcPts val="800"/>
-              </a:spcBef>
-              <a:defRPr sz="1300">
-                <a:solidFill>
-                  <a:srgbClr val="F8FAFC"/>
-                </a:solidFill>
-              </a:defRPr>
-            </a:pPr>
-            <a:r>
-              <a:t>•  Verifies all claims with primary sources</a:t>
-            </a:r>
-          </a:p>
-          <a:p>
-            <a:pPr>
-              <a:spcBef>
-                <a:spcPts val="800"/>
-              </a:spcBef>
-              <a:defRPr sz="1300">
-                <a:solidFill>
-                  <a:srgbClr val="F8FAFC"/>
-                </a:solidFill>
-              </a:defRPr>
-            </a:pPr>
-            <a:r>
-              <a:t>•  Accelerates learning velocity without replacing thought</a:t>
-            </a:r>
-          </a:p>
-        </p:txBody>
-      </p:sp>
-      <p:sp>
-        <p:nvSpPr>
-          <p:cNvPr id="8" name="Rounded Rectangle 7"/>
+              <a:t>Classroom Syllabi Best Practices</a:t>
+            </a:r>
+          </a:p>
+        </p:txBody>
+      </p:sp>
+      <p:pic>
+        <p:nvPicPr>
+          <p:cNvPr id="4" name="!!Content_Image" descr="ai_future.png"/>
+          <p:cNvPicPr>
+            <a:picLocks noChangeAspect="1"/>
+          </p:cNvPicPr>
+          <p:nvPr/>
+        </p:nvPicPr>
+        <p:blipFill>
+          <a:blip r:embed="rId2"/>
+          <a:stretch>
+            <a:fillRect/>
+          </a:stretch>
+        </p:blipFill>
+        <p:spPr>
+          <a:xfrm>
+            <a:off x="731520" y="1645920"/>
+            <a:ext cx="5029200" cy="4389120"/>
+          </a:xfrm>
+          <a:prstGeom prst="rect">
+            <a:avLst/>
+          </a:prstGeom>
+        </p:spPr>
+      </p:pic>
+      <p:sp>
+        <p:nvSpPr>
+          <p:cNvPr id="5" name="!!Card_1"/>
           <p:cNvSpPr/>
           <p:nvPr/>
         </p:nvSpPr>
         <p:spPr>
           <a:xfrm>
-            <a:off x="6217920" y="1828800"/>
-            <a:ext cx="5212080" cy="4114800"/>
+            <a:off x="6126480" y="1645920"/>
+            <a:ext cx="5303520" cy="1280160"/>
           </a:xfrm>
           <a:prstGeom prst="roundRect">
             <a:avLst/>
           </a:prstGeom>
           <a:solidFill>
-            <a:srgbClr val="131F37"/>
+            <a:srgbClr val="131D32"/>
           </a:solidFill>
-          <a:ln w="25400">
+          <a:ln w="12700">
             <a:solidFill>
-              <a:srgbClr val="7C3AED"/>
+              <a:srgbClr val="00E5FF"/>
             </a:solidFill>
           </a:ln>
         </p:spPr>
@@ -7483,104 +6604,162 @@
           </a:fontRef>
         </p:style>
         <p:txBody>
-          <a:bodyPr rtlCol="0" anchor="ctr"/>
-          <a:lstStyle/>
-          <a:p>
-            <a:pPr algn="ctr"/>
-          </a:p>
-        </p:txBody>
-      </p:sp>
-      <p:sp>
-        <p:nvSpPr>
-          <p:cNvPr id="9" name="TextBox 8"/>
-          <p:cNvSpPr txBox="1"/>
+          <a:bodyPr rtlCol="0" anchor="ctr" wrap="square"/>
+          <a:lstStyle/>
+          <a:p>
+            <a:pPr algn="ctr">
+              <a:defRPr b="1" sz="1300">
+                <a:solidFill>
+                  <a:srgbClr val="FFFFFF"/>
+                </a:solidFill>
+              </a:defRPr>
+            </a:pPr>
+            <a:r>
+              <a:t>Mandatory Disclosure Logs</a:t>
+            </a:r>
+          </a:p>
+          <a:p>
+            <a:pPr>
+              <a:defRPr sz="1050">
+                <a:solidFill>
+                  <a:srgbClr val="DCE6F2"/>
+                </a:solidFill>
+              </a:defRPr>
+            </a:pPr>
+            <a:r>
+              <a:t>Students submit an AI appendix detailing prompts used, AI outputs, and personal revisions.</a:t>
+            </a:r>
+          </a:p>
+        </p:txBody>
+      </p:sp>
+      <p:sp>
+        <p:nvSpPr>
+          <p:cNvPr id="6" name="!!Card_2"/>
+          <p:cNvSpPr/>
           <p:nvPr/>
         </p:nvSpPr>
         <p:spPr>
           <a:xfrm>
-            <a:off x="6400800" y="2011680"/>
-            <a:ext cx="4846320" cy="3657600"/>
-          </a:xfrm>
-          <a:prstGeom prst="rect">
+            <a:off x="6126480" y="3108960"/>
+            <a:ext cx="5303520" cy="1280160"/>
+          </a:xfrm>
+          <a:prstGeom prst="roundRect">
             <a:avLst/>
           </a:prstGeom>
-          <a:noFill/>
-        </p:spPr>
-        <p:txBody>
-          <a:bodyPr wrap="square">
-            <a:spAutoFit/>
-          </a:bodyPr>
-          <a:lstStyle/>
+          <a:solidFill>
+            <a:srgbClr val="131D32"/>
+          </a:solidFill>
+          <a:ln w="12700">
+            <a:solidFill>
+              <a:srgbClr val="00E5FF"/>
+            </a:solidFill>
+          </a:ln>
+        </p:spPr>
+        <p:style>
+          <a:lnRef idx="1">
+            <a:schemeClr val="accent1"/>
+          </a:lnRef>
+          <a:fillRef idx="3">
+            <a:schemeClr val="accent1"/>
+          </a:fillRef>
+          <a:effectRef idx="2">
+            <a:schemeClr val="accent1"/>
+          </a:effectRef>
+          <a:fontRef idx="minor">
+            <a:schemeClr val="lt1"/>
+          </a:fontRef>
+        </p:style>
+        <p:txBody>
+          <a:bodyPr rtlCol="0" anchor="ctr" wrap="square"/>
+          <a:lstStyle/>
+          <a:p>
+            <a:pPr algn="ctr">
+              <a:defRPr b="1" sz="1300">
+                <a:solidFill>
+                  <a:srgbClr val="FFFFFF"/>
+                </a:solidFill>
+              </a:defRPr>
+            </a:pPr>
+            <a:r>
+              <a:t>Oral Defense &amp; Whiteboarding</a:t>
+            </a:r>
+          </a:p>
           <a:p>
             <a:pPr>
-              <a:defRPr sz="1800" b="1">
-                <a:solidFill>
-                  <a:srgbClr val="7C3AED"/>
+              <a:defRPr sz="1050">
+                <a:solidFill>
+                  <a:srgbClr val="DCE6F2"/>
                 </a:solidFill>
               </a:defRPr>
             </a:pPr>
             <a:r>
-              <a:t>Deceptive Dependence</a:t>
+              <a:t>Evaluating student code mastery through live whiteboard walkthroughs and conceptual defense.</a:t>
+            </a:r>
+          </a:p>
+        </p:txBody>
+      </p:sp>
+      <p:sp>
+        <p:nvSpPr>
+          <p:cNvPr id="7" name="!!Card_3"/>
+          <p:cNvSpPr/>
+          <p:nvPr/>
+        </p:nvSpPr>
+        <p:spPr>
+          <a:xfrm>
+            <a:off x="6126480" y="4572000"/>
+            <a:ext cx="5303520" cy="1280160"/>
+          </a:xfrm>
+          <a:prstGeom prst="roundRect">
+            <a:avLst/>
+          </a:prstGeom>
+          <a:solidFill>
+            <a:srgbClr val="131D32"/>
+          </a:solidFill>
+          <a:ln w="12700">
+            <a:solidFill>
+              <a:srgbClr val="00E5FF"/>
+            </a:solidFill>
+          </a:ln>
+        </p:spPr>
+        <p:style>
+          <a:lnRef idx="1">
+            <a:schemeClr val="accent1"/>
+          </a:lnRef>
+          <a:fillRef idx="3">
+            <a:schemeClr val="accent1"/>
+          </a:fillRef>
+          <a:effectRef idx="2">
+            <a:schemeClr val="accent1"/>
+          </a:effectRef>
+          <a:fontRef idx="minor">
+            <a:schemeClr val="lt1"/>
+          </a:fontRef>
+        </p:style>
+        <p:txBody>
+          <a:bodyPr rtlCol="0" anchor="ctr" wrap="square"/>
+          <a:lstStyle/>
+          <a:p>
+            <a:pPr algn="ctr">
+              <a:defRPr b="1" sz="1300">
+                <a:solidFill>
+                  <a:srgbClr val="FFFFFF"/>
+                </a:solidFill>
+              </a:defRPr>
+            </a:pPr>
+            <a:r>
+              <a:t>Institutional Model Subscriptions</a:t>
             </a:r>
           </a:p>
           <a:p>
             <a:pPr>
-              <a:spcBef>
-                <a:spcPts val="800"/>
-              </a:spcBef>
-              <a:defRPr sz="1300">
-                <a:solidFill>
-                  <a:srgbClr val="F8FAFC"/>
+              <a:defRPr sz="1050">
+                <a:solidFill>
+                  <a:srgbClr val="DCE6F2"/>
                 </a:solidFill>
               </a:defRPr>
             </a:pPr>
             <a:r>
-              <a:t>•  Copies full AI responses without reading</a:t>
-            </a:r>
-          </a:p>
-          <a:p>
-            <a:pPr>
-              <a:spcBef>
-                <a:spcPts val="800"/>
-              </a:spcBef>
-              <a:defRPr sz="1300">
-                <a:solidFill>
-                  <a:srgbClr val="F8FAFC"/>
-                </a:solidFill>
-              </a:defRPr>
-            </a:pPr>
-            <a:r>
-              <a:t>•  Surrenders problem-solving to automated outputs</a:t>
-            </a:r>
-          </a:p>
-          <a:p>
-            <a:pPr>
-              <a:spcBef>
-                <a:spcPts val="800"/>
-              </a:spcBef>
-              <a:defRPr sz="1300">
-                <a:solidFill>
-                  <a:srgbClr val="F8FAFC"/>
-                </a:solidFill>
-              </a:defRPr>
-            </a:pPr>
-            <a:r>
-              <a:t>•  Blindly trusts unverified AI hallucinations</a:t>
-            </a:r>
-          </a:p>
-          <a:p>
-            <a:pPr>
-              <a:spcBef>
-                <a:spcPts val="800"/>
-              </a:spcBef>
-              <a:defRPr sz="1300">
-                <a:solidFill>
-                  <a:srgbClr val="F8FAFC"/>
-                </a:solidFill>
-              </a:defRPr>
-            </a:pPr>
-            <a:r>
-              <a:t>•  Gradually atrophies fundamental critical reasoning</a:t>
+              <a:t>Universities provision privacy-shielded enterprise AI tiers that safeguard student data.</a:t>
             </a:r>
           </a:p>
         </p:txBody>
@@ -7596,8 +6775,8 @@
 </p:sld>
 </file>
 
-<file path=ppt/slides/slide8.xml><?xml version="1.0" encoding="utf-8"?>
-<p:sld xmlns:a="http://schemas.openxmlformats.org/drawingml/2006/main" xmlns:p="http://schemas.openxmlformats.org/presentationml/2006/main" xmlns:r="http://schemas.openxmlformats.org/officeDocument/2006/relationships">
+<file path=ppt/slides/slide9.xml><?xml version="1.0" encoding="utf-8"?>
+<p:sld xmlns:p14="http://schemas.microsoft.com/office/powerpoint/2010/main" xmlns:a="http://schemas.openxmlformats.org/drawingml/2006/main" xmlns:p="http://schemas.openxmlformats.org/presentationml/2006/main" xmlns:r="http://schemas.openxmlformats.org/officeDocument/2006/relationships">
   <p:cSld>
     <p:spTree>
       <p:nvGrpSpPr>
@@ -7657,8 +6836,8 @@
         </p:nvSpPr>
         <p:spPr>
           <a:xfrm>
-            <a:off x="731520" y="6400800"/>
-            <a:ext cx="10728655" cy="320040"/>
+            <a:off x="731520" y="457200"/>
+            <a:ext cx="10698480" cy="1005840"/>
           </a:xfrm>
           <a:prstGeom prst="rect">
             <a:avLst/>
@@ -7666,43 +6845,57 @@
           <a:noFill/>
         </p:spPr>
         <p:txBody>
-          <a:bodyPr wrap="none">
+          <a:bodyPr wrap="square">
             <a:spAutoFit/>
           </a:bodyPr>
           <a:lstStyle/>
           <a:p>
             <a:pPr>
-              <a:defRPr sz="900">
-                <a:solidFill>
-                  <a:srgbClr val="94A3B8"/>
+              <a:defRPr sz="1100" b="1">
+                <a:solidFill>
+                  <a:srgbClr val="00E5FF"/>
                 </a:solidFill>
               </a:defRPr>
             </a:pPr>
             <a:r>
-              <a:t>STI West Negros University  •  Jhon Paulo V. Gascon  •  Slide 8 of 11</a:t>
-            </a:r>
-          </a:p>
-        </p:txBody>
-      </p:sp>
-      <p:sp>
-        <p:nvSpPr>
-          <p:cNvPr id="4" name="Rectangle 3"/>
+              <a:t>POLICY BLUEPRINT</a:t>
+            </a:r>
+          </a:p>
+          <a:p>
+            <a:pPr>
+              <a:defRPr sz="2400" b="1">
+                <a:solidFill>
+                  <a:srgbClr val="FFFFFF"/>
+                </a:solidFill>
+              </a:defRPr>
+            </a:pPr>
+            <a:r>
+              <a:t>The Three Tiers of AI Governance</a:t>
+            </a:r>
+          </a:p>
+        </p:txBody>
+      </p:sp>
+      <p:sp>
+        <p:nvSpPr>
+          <p:cNvPr id="4" name="!!Card_1"/>
           <p:cNvSpPr/>
           <p:nvPr/>
         </p:nvSpPr>
         <p:spPr>
           <a:xfrm>
-            <a:off x="731520" y="2286000"/>
-            <a:ext cx="457200" cy="2560320"/>
-          </a:xfrm>
-          <a:prstGeom prst="rect">
+            <a:off x="731520" y="1645920"/>
+            <a:ext cx="3291840" cy="4114800"/>
+          </a:xfrm>
+          <a:prstGeom prst="roundRect">
             <a:avLst/>
           </a:prstGeom>
           <a:solidFill>
-            <a:srgbClr val="22D3EE"/>
+            <a:srgbClr val="131D32"/>
           </a:solidFill>
-          <a:ln>
-            <a:noFill/>
+          <a:ln w="19050">
+            <a:solidFill>
+              <a:srgbClr val="00E5FF"/>
+            </a:solidFill>
           </a:ln>
         </p:spPr>
         <p:style>
@@ -7720,79 +6913,162 @@
           </a:fontRef>
         </p:style>
         <p:txBody>
-          <a:bodyPr rtlCol="0" anchor="ctr"/>
-          <a:lstStyle/>
-          <a:p>
-            <a:pPr algn="ctr"/>
-          </a:p>
-        </p:txBody>
-      </p:sp>
-      <p:sp>
-        <p:nvSpPr>
-          <p:cNvPr id="5" name="TextBox 4"/>
-          <p:cNvSpPr txBox="1"/>
+          <a:bodyPr rtlCol="0" anchor="ctr" wrap="square"/>
+          <a:lstStyle/>
+          <a:p>
+            <a:pPr algn="ctr">
+              <a:defRPr b="1" sz="1500">
+                <a:solidFill>
+                  <a:srgbClr val="00E5FF"/>
+                </a:solidFill>
+              </a:defRPr>
+            </a:pPr>
+            <a:r>
+              <a:t>Tier 1: Permitted Use</a:t>
+            </a:r>
+          </a:p>
+          <a:p>
+            <a:pPr>
+              <a:defRPr sz="1100">
+                <a:solidFill>
+                  <a:srgbClr val="F0F0F0"/>
+                </a:solidFill>
+              </a:defRPr>
+            </a:pPr>
+            <a:r>
+              <a:t>Brainstorming project topics, finding syntax errors, and practicing mock interview questions.</a:t>
+            </a:r>
+          </a:p>
+        </p:txBody>
+      </p:sp>
+      <p:sp>
+        <p:nvSpPr>
+          <p:cNvPr id="5" name="!!Card_2"/>
+          <p:cNvSpPr/>
           <p:nvPr/>
         </p:nvSpPr>
         <p:spPr>
           <a:xfrm>
-            <a:off x="1463040" y="2194560"/>
-            <a:ext cx="9601200" cy="1371600"/>
-          </a:xfrm>
-          <a:prstGeom prst="rect">
+            <a:off x="4389120" y="1645920"/>
+            <a:ext cx="3291840" cy="4114800"/>
+          </a:xfrm>
+          <a:prstGeom prst="roundRect">
             <a:avLst/>
           </a:prstGeom>
-          <a:noFill/>
-        </p:spPr>
-        <p:txBody>
-          <a:bodyPr wrap="none">
-            <a:spAutoFit/>
-          </a:bodyPr>
-          <a:lstStyle/>
+          <a:solidFill>
+            <a:srgbClr val="131D32"/>
+          </a:solidFill>
+          <a:ln w="19050">
+            <a:solidFill>
+              <a:srgbClr val="00E5FF"/>
+            </a:solidFill>
+          </a:ln>
+        </p:spPr>
+        <p:style>
+          <a:lnRef idx="1">
+            <a:schemeClr val="accent1"/>
+          </a:lnRef>
+          <a:fillRef idx="3">
+            <a:schemeClr val="accent1"/>
+          </a:fillRef>
+          <a:effectRef idx="2">
+            <a:schemeClr val="accent1"/>
+          </a:effectRef>
+          <a:fontRef idx="minor">
+            <a:schemeClr val="lt1"/>
+          </a:fontRef>
+        </p:style>
+        <p:txBody>
+          <a:bodyPr rtlCol="0" anchor="ctr" wrap="square"/>
+          <a:lstStyle/>
+          <a:p>
+            <a:pPr algn="ctr">
+              <a:defRPr b="1" sz="1500">
+                <a:solidFill>
+                  <a:srgbClr val="00E5FF"/>
+                </a:solidFill>
+              </a:defRPr>
+            </a:pPr>
+            <a:r>
+              <a:t>Tier 2: Disclosed Use</a:t>
+            </a:r>
+          </a:p>
           <a:p>
             <a:pPr>
-              <a:defRPr sz="3800" b="1">
-                <a:solidFill>
-                  <a:srgbClr val="F8FAFC"/>
+              <a:defRPr sz="1100">
+                <a:solidFill>
+                  <a:srgbClr val="F0F0F0"/>
                 </a:solidFill>
               </a:defRPr>
             </a:pPr>
             <a:r>
-              <a:t>Part II: Safeguards &amp; The Road Ahead</a:t>
-            </a:r>
-          </a:p>
-        </p:txBody>
-      </p:sp>
-      <p:sp>
-        <p:nvSpPr>
-          <p:cNvPr id="6" name="TextBox 5"/>
-          <p:cNvSpPr txBox="1"/>
+              <a:t>Synthesizing research abstracts and drafting code templates with mandatory prompt citation.</a:t>
+            </a:r>
+          </a:p>
+        </p:txBody>
+      </p:sp>
+      <p:sp>
+        <p:nvSpPr>
+          <p:cNvPr id="6" name="!!Card_3"/>
+          <p:cNvSpPr/>
           <p:nvPr/>
         </p:nvSpPr>
         <p:spPr>
           <a:xfrm>
-            <a:off x="1463040" y="3657600"/>
-            <a:ext cx="9601200" cy="1371600"/>
-          </a:xfrm>
-          <a:prstGeom prst="rect">
+            <a:off x="8046720" y="1645920"/>
+            <a:ext cx="3291840" cy="4114800"/>
+          </a:xfrm>
+          <a:prstGeom prst="roundRect">
             <a:avLst/>
           </a:prstGeom>
-          <a:noFill/>
-        </p:spPr>
-        <p:txBody>
-          <a:bodyPr wrap="none">
-            <a:spAutoFit/>
-          </a:bodyPr>
-          <a:lstStyle/>
+          <a:solidFill>
+            <a:srgbClr val="131D32"/>
+          </a:solidFill>
+          <a:ln w="19050">
+            <a:solidFill>
+              <a:srgbClr val="00E5FF"/>
+            </a:solidFill>
+          </a:ln>
+        </p:spPr>
+        <p:style>
+          <a:lnRef idx="1">
+            <a:schemeClr val="accent1"/>
+          </a:lnRef>
+          <a:fillRef idx="3">
+            <a:schemeClr val="accent1"/>
+          </a:fillRef>
+          <a:effectRef idx="2">
+            <a:schemeClr val="accent1"/>
+          </a:effectRef>
+          <a:fontRef idx="minor">
+            <a:schemeClr val="lt1"/>
+          </a:fontRef>
+        </p:style>
+        <p:txBody>
+          <a:bodyPr rtlCol="0" anchor="ctr" wrap="square"/>
+          <a:lstStyle/>
+          <a:p>
+            <a:pPr algn="ctr">
+              <a:defRPr b="1" sz="1500">
+                <a:solidFill>
+                  <a:srgbClr val="00E5FF"/>
+                </a:solidFill>
+              </a:defRPr>
+            </a:pPr>
+            <a:r>
+              <a:t>Tier 3: Strictly Prohibited</a:t>
+            </a:r>
+          </a:p>
           <a:p>
             <a:pPr>
-              <a:defRPr sz="2200">
-                <a:solidFill>
-                  <a:srgbClr val="94A3B8"/>
+              <a:defRPr sz="1100">
+                <a:solidFill>
+                  <a:srgbClr val="F0F0F0"/>
                 </a:solidFill>
               </a:defRPr>
             </a:pPr>
             <a:r>
-              <a:t>Building responsible, verifiable academic practices.</a:t>
+              <a:t>Submitting unedited AI essays, take-home exam completions, and unauthorized auto-prompting.</a:t>
             </a:r>
           </a:p>
         </p:txBody>
@@ -7802,618 +7078,18 @@
   <p:clrMapOvr>
     <a:masterClrMapping/>
   </p:clrMapOvr>
-  <p:transition spd="med">
-    <p:push dir="u"/>
-  </p:transition>
-</p:sld>
-</file>
-
-<file path=ppt/slides/slide9.xml><?xml version="1.0" encoding="utf-8"?>
-<p:sld xmlns:a="http://schemas.openxmlformats.org/drawingml/2006/main" xmlns:p="http://schemas.openxmlformats.org/presentationml/2006/main" xmlns:r="http://schemas.openxmlformats.org/officeDocument/2006/relationships">
-  <p:cSld>
-    <p:spTree>
-      <p:nvGrpSpPr>
-        <p:cNvPr id="1" name=""/>
-        <p:cNvGrpSpPr/>
-        <p:nvPr/>
-      </p:nvGrpSpPr>
-      <p:grpSpPr/>
-      <p:sp>
-        <p:nvSpPr>
-          <p:cNvPr id="2" name="Rectangle 1"/>
-          <p:cNvSpPr/>
-          <p:nvPr/>
-        </p:nvSpPr>
-        <p:spPr>
-          <a:xfrm>
-            <a:off x="0" y="0"/>
-            <a:ext cx="12191695" cy="6858000"/>
-          </a:xfrm>
-          <a:prstGeom prst="rect">
-            <a:avLst/>
-          </a:prstGeom>
-          <a:solidFill>
-            <a:srgbClr val="0B1220"/>
-          </a:solidFill>
-          <a:ln>
-            <a:noFill/>
-          </a:ln>
-        </p:spPr>
-        <p:style>
-          <a:lnRef idx="1">
-            <a:schemeClr val="accent1"/>
-          </a:lnRef>
-          <a:fillRef idx="3">
-            <a:schemeClr val="accent1"/>
-          </a:fillRef>
-          <a:effectRef idx="2">
-            <a:schemeClr val="accent1"/>
-          </a:effectRef>
-          <a:fontRef idx="minor">
-            <a:schemeClr val="lt1"/>
-          </a:fontRef>
-        </p:style>
-        <p:txBody>
-          <a:bodyPr rtlCol="0" anchor="ctr"/>
-          <a:lstStyle/>
-          <a:p>
-            <a:pPr algn="ctr"/>
-          </a:p>
-        </p:txBody>
-      </p:sp>
-      <p:sp>
-        <p:nvSpPr>
-          <p:cNvPr id="3" name="TextBox 2"/>
-          <p:cNvSpPr txBox="1"/>
-          <p:nvPr/>
-        </p:nvSpPr>
-        <p:spPr>
-          <a:xfrm>
-            <a:off x="731520" y="365760"/>
-            <a:ext cx="10058400" cy="365760"/>
-          </a:xfrm>
-          <a:prstGeom prst="rect">
-            <a:avLst/>
-          </a:prstGeom>
-          <a:noFill/>
-        </p:spPr>
-        <p:txBody>
-          <a:bodyPr wrap="none">
-            <a:spAutoFit/>
-          </a:bodyPr>
-          <a:lstStyle/>
-          <a:p>
-            <a:pPr>
-              <a:defRPr sz="1100" b="1">
-                <a:solidFill>
-                  <a:srgbClr val="22D3EE"/>
-                </a:solidFill>
-              </a:defRPr>
-            </a:pPr>
-            <a:r>
-              <a:t>EXECUTION METHODOLOGY</a:t>
-            </a:r>
-          </a:p>
-        </p:txBody>
-      </p:sp>
-      <p:sp>
-        <p:nvSpPr>
-          <p:cNvPr id="4" name="TextBox 3"/>
-          <p:cNvSpPr txBox="1"/>
-          <p:nvPr/>
-        </p:nvSpPr>
-        <p:spPr>
-          <a:xfrm>
-            <a:off x="731520" y="685800"/>
-            <a:ext cx="10515600" cy="731520"/>
-          </a:xfrm>
-          <a:prstGeom prst="rect">
-            <a:avLst/>
-          </a:prstGeom>
-          <a:noFill/>
-        </p:spPr>
-        <p:txBody>
-          <a:bodyPr wrap="none">
-            <a:spAutoFit/>
-          </a:bodyPr>
-          <a:lstStyle/>
-          <a:p>
-            <a:pPr>
-              <a:defRPr sz="2600" b="1">
-                <a:solidFill>
-                  <a:srgbClr val="F8FAFC"/>
-                </a:solidFill>
-              </a:defRPr>
-            </a:pPr>
-            <a:r>
-              <a:t>The 4-Step Verifiable AI Research Protocol</a:t>
-            </a:r>
-          </a:p>
-        </p:txBody>
-      </p:sp>
-      <p:sp>
-        <p:nvSpPr>
-          <p:cNvPr id="5" name="TextBox 4"/>
-          <p:cNvSpPr txBox="1"/>
-          <p:nvPr/>
-        </p:nvSpPr>
-        <p:spPr>
-          <a:xfrm>
-            <a:off x="731520" y="6400800"/>
-            <a:ext cx="10728655" cy="320040"/>
-          </a:xfrm>
-          <a:prstGeom prst="rect">
-            <a:avLst/>
-          </a:prstGeom>
-          <a:noFill/>
-        </p:spPr>
-        <p:txBody>
-          <a:bodyPr wrap="none">
-            <a:spAutoFit/>
-          </a:bodyPr>
-          <a:lstStyle/>
-          <a:p>
-            <a:pPr>
-              <a:defRPr sz="900">
-                <a:solidFill>
-                  <a:srgbClr val="94A3B8"/>
-                </a:solidFill>
-              </a:defRPr>
-            </a:pPr>
-            <a:r>
-              <a:t>STI West Negros University  •  Jhon Paulo V. Gascon  •  Slide 9 of 11</a:t>
-            </a:r>
-          </a:p>
-        </p:txBody>
-      </p:sp>
-      <p:sp>
-        <p:nvSpPr>
-          <p:cNvPr id="6" name="Rounded Rectangle 5"/>
-          <p:cNvSpPr/>
-          <p:nvPr/>
-        </p:nvSpPr>
-        <p:spPr>
-          <a:xfrm>
-            <a:off x="731520" y="2011680"/>
-            <a:ext cx="2514600" cy="3840480"/>
-          </a:xfrm>
-          <a:prstGeom prst="roundRect">
-            <a:avLst/>
-          </a:prstGeom>
-          <a:solidFill>
-            <a:srgbClr val="131F37"/>
-          </a:solidFill>
-          <a:ln w="19050">
-            <a:solidFill>
-              <a:srgbClr val="22D3EE"/>
-            </a:solidFill>
-          </a:ln>
-        </p:spPr>
-        <p:style>
-          <a:lnRef idx="1">
-            <a:schemeClr val="accent1"/>
-          </a:lnRef>
-          <a:fillRef idx="3">
-            <a:schemeClr val="accent1"/>
-          </a:fillRef>
-          <a:effectRef idx="2">
-            <a:schemeClr val="accent1"/>
-          </a:effectRef>
-          <a:fontRef idx="minor">
-            <a:schemeClr val="lt1"/>
-          </a:fontRef>
-        </p:style>
-        <p:txBody>
-          <a:bodyPr rtlCol="0" anchor="ctr"/>
-          <a:lstStyle/>
-          <a:p>
-            <a:pPr algn="ctr"/>
-          </a:p>
-        </p:txBody>
-      </p:sp>
-      <p:sp>
-        <p:nvSpPr>
-          <p:cNvPr id="7" name="TextBox 6"/>
-          <p:cNvSpPr txBox="1"/>
-          <p:nvPr/>
-        </p:nvSpPr>
-        <p:spPr>
-          <a:xfrm>
-            <a:off x="868680" y="2194560"/>
-            <a:ext cx="2240280" cy="3474720"/>
-          </a:xfrm>
-          <a:prstGeom prst="rect">
-            <a:avLst/>
-          </a:prstGeom>
-          <a:noFill/>
-        </p:spPr>
-        <p:txBody>
-          <a:bodyPr wrap="square">
-            <a:spAutoFit/>
-          </a:bodyPr>
-          <a:lstStyle/>
-          <a:p>
-            <a:pPr>
-              <a:defRPr sz="1300" b="1">
-                <a:solidFill>
-                  <a:srgbClr val="7C3AED"/>
-                </a:solidFill>
-              </a:defRPr>
-            </a:pPr>
-            <a:r>
-              <a:t>Step 1</a:t>
-            </a:r>
-          </a:p>
-          <a:p>
-            <a:pPr>
-              <a:spcBef>
-                <a:spcPts val="600"/>
-              </a:spcBef>
-              <a:defRPr sz="1600" b="1">
-                <a:solidFill>
-                  <a:srgbClr val="F8FAFC"/>
-                </a:solidFill>
-              </a:defRPr>
-            </a:pPr>
-            <a:r>
-              <a:t>Prompt with Context</a:t>
-            </a:r>
-          </a:p>
-          <a:p>
-            <a:pPr>
-              <a:spcBef>
-                <a:spcPts val="800"/>
-              </a:spcBef>
-              <a:defRPr sz="1200">
-                <a:solidFill>
-                  <a:srgbClr val="94A3B8"/>
-                </a:solidFill>
-              </a:defRPr>
-            </a:pPr>
-            <a:r>
-              <a:t>Define technical constraints, target audience, and precise formatting rules.</a:t>
-            </a:r>
-          </a:p>
-        </p:txBody>
-      </p:sp>
-      <p:sp>
-        <p:nvSpPr>
-          <p:cNvPr id="8" name="Rounded Rectangle 7"/>
-          <p:cNvSpPr/>
-          <p:nvPr/>
-        </p:nvSpPr>
-        <p:spPr>
-          <a:xfrm>
-            <a:off x="3429000" y="2011680"/>
-            <a:ext cx="2514600" cy="3840480"/>
-          </a:xfrm>
-          <a:prstGeom prst="roundRect">
-            <a:avLst/>
-          </a:prstGeom>
-          <a:solidFill>
-            <a:srgbClr val="131F37"/>
-          </a:solidFill>
-          <a:ln w="19050">
-            <a:solidFill>
-              <a:srgbClr val="22D3EE"/>
-            </a:solidFill>
-          </a:ln>
-        </p:spPr>
-        <p:style>
-          <a:lnRef idx="1">
-            <a:schemeClr val="accent1"/>
-          </a:lnRef>
-          <a:fillRef idx="3">
-            <a:schemeClr val="accent1"/>
-          </a:fillRef>
-          <a:effectRef idx="2">
-            <a:schemeClr val="accent1"/>
-          </a:effectRef>
-          <a:fontRef idx="minor">
-            <a:schemeClr val="lt1"/>
-          </a:fontRef>
-        </p:style>
-        <p:txBody>
-          <a:bodyPr rtlCol="0" anchor="ctr"/>
-          <a:lstStyle/>
-          <a:p>
-            <a:pPr algn="ctr"/>
-          </a:p>
-        </p:txBody>
-      </p:sp>
-      <p:sp>
-        <p:nvSpPr>
-          <p:cNvPr id="9" name="TextBox 8"/>
-          <p:cNvSpPr txBox="1"/>
-          <p:nvPr/>
-        </p:nvSpPr>
-        <p:spPr>
-          <a:xfrm>
-            <a:off x="3566160" y="2194560"/>
-            <a:ext cx="2240280" cy="3474720"/>
-          </a:xfrm>
-          <a:prstGeom prst="rect">
-            <a:avLst/>
-          </a:prstGeom>
-          <a:noFill/>
-        </p:spPr>
-        <p:txBody>
-          <a:bodyPr wrap="square">
-            <a:spAutoFit/>
-          </a:bodyPr>
-          <a:lstStyle/>
-          <a:p>
-            <a:pPr>
-              <a:defRPr sz="1300" b="1">
-                <a:solidFill>
-                  <a:srgbClr val="7C3AED"/>
-                </a:solidFill>
-              </a:defRPr>
-            </a:pPr>
-            <a:r>
-              <a:t>Step 2</a:t>
-            </a:r>
-          </a:p>
-          <a:p>
-            <a:pPr>
-              <a:spcBef>
-                <a:spcPts val="600"/>
-              </a:spcBef>
-              <a:defRPr sz="1600" b="1">
-                <a:solidFill>
-                  <a:srgbClr val="F8FAFC"/>
-                </a:solidFill>
-              </a:defRPr>
-            </a:pPr>
-            <a:r>
-              <a:t>Audit Logic</a:t>
-            </a:r>
-          </a:p>
-          <a:p>
-            <a:pPr>
-              <a:spcBef>
-                <a:spcPts val="800"/>
-              </a:spcBef>
-              <a:defRPr sz="1200">
-                <a:solidFill>
-                  <a:srgbClr val="94A3B8"/>
-                </a:solidFill>
-              </a:defRPr>
-            </a:pPr>
-            <a:r>
-              <a:t>Analyze every generated function and paragraph line-by-line.</a:t>
-            </a:r>
-          </a:p>
-        </p:txBody>
-      </p:sp>
-      <p:sp>
-        <p:nvSpPr>
-          <p:cNvPr id="10" name="Rounded Rectangle 9"/>
-          <p:cNvSpPr/>
-          <p:nvPr/>
-        </p:nvSpPr>
-        <p:spPr>
-          <a:xfrm>
-            <a:off x="6126480" y="2011680"/>
-            <a:ext cx="2514600" cy="3840480"/>
-          </a:xfrm>
-          <a:prstGeom prst="roundRect">
-            <a:avLst/>
-          </a:prstGeom>
-          <a:solidFill>
-            <a:srgbClr val="131F37"/>
-          </a:solidFill>
-          <a:ln w="19050">
-            <a:solidFill>
-              <a:srgbClr val="22D3EE"/>
-            </a:solidFill>
-          </a:ln>
-        </p:spPr>
-        <p:style>
-          <a:lnRef idx="1">
-            <a:schemeClr val="accent1"/>
-          </a:lnRef>
-          <a:fillRef idx="3">
-            <a:schemeClr val="accent1"/>
-          </a:fillRef>
-          <a:effectRef idx="2">
-            <a:schemeClr val="accent1"/>
-          </a:effectRef>
-          <a:fontRef idx="minor">
-            <a:schemeClr val="lt1"/>
-          </a:fontRef>
-        </p:style>
-        <p:txBody>
-          <a:bodyPr rtlCol="0" anchor="ctr"/>
-          <a:lstStyle/>
-          <a:p>
-            <a:pPr algn="ctr"/>
-          </a:p>
-        </p:txBody>
-      </p:sp>
-      <p:sp>
-        <p:nvSpPr>
-          <p:cNvPr id="11" name="TextBox 10"/>
-          <p:cNvSpPr txBox="1"/>
-          <p:nvPr/>
-        </p:nvSpPr>
-        <p:spPr>
-          <a:xfrm>
-            <a:off x="6263640" y="2194560"/>
-            <a:ext cx="2240280" cy="3474720"/>
-          </a:xfrm>
-          <a:prstGeom prst="rect">
-            <a:avLst/>
-          </a:prstGeom>
-          <a:noFill/>
-        </p:spPr>
-        <p:txBody>
-          <a:bodyPr wrap="square">
-            <a:spAutoFit/>
-          </a:bodyPr>
-          <a:lstStyle/>
-          <a:p>
-            <a:pPr>
-              <a:defRPr sz="1300" b="1">
-                <a:solidFill>
-                  <a:srgbClr val="7C3AED"/>
-                </a:solidFill>
-              </a:defRPr>
-            </a:pPr>
-            <a:r>
-              <a:t>Step 3</a:t>
-            </a:r>
-          </a:p>
-          <a:p>
-            <a:pPr>
-              <a:spcBef>
-                <a:spcPts val="600"/>
-              </a:spcBef>
-              <a:defRPr sz="1600" b="1">
-                <a:solidFill>
-                  <a:srgbClr val="F8FAFC"/>
-                </a:solidFill>
-              </a:defRPr>
-            </a:pPr>
-            <a:r>
-              <a:t>Cross-Reference</a:t>
-            </a:r>
-          </a:p>
-          <a:p>
-            <a:pPr>
-              <a:spcBef>
-                <a:spcPts val="800"/>
-              </a:spcBef>
-              <a:defRPr sz="1200">
-                <a:solidFill>
-                  <a:srgbClr val="94A3B8"/>
-                </a:solidFill>
-              </a:defRPr>
-            </a:pPr>
-            <a:r>
-              <a:t>Validate citations in official databases like LawPhil or IEEE Xplore.</a:t>
-            </a:r>
-          </a:p>
-        </p:txBody>
-      </p:sp>
-      <p:sp>
-        <p:nvSpPr>
-          <p:cNvPr id="12" name="Rounded Rectangle 11"/>
-          <p:cNvSpPr/>
-          <p:nvPr/>
-        </p:nvSpPr>
-        <p:spPr>
-          <a:xfrm>
-            <a:off x="8823960" y="2011680"/>
-            <a:ext cx="2514600" cy="3840480"/>
-          </a:xfrm>
-          <a:prstGeom prst="roundRect">
-            <a:avLst/>
-          </a:prstGeom>
-          <a:solidFill>
-            <a:srgbClr val="131F37"/>
-          </a:solidFill>
-          <a:ln w="19050">
-            <a:solidFill>
-              <a:srgbClr val="22D3EE"/>
-            </a:solidFill>
-          </a:ln>
-        </p:spPr>
-        <p:style>
-          <a:lnRef idx="1">
-            <a:schemeClr val="accent1"/>
-          </a:lnRef>
-          <a:fillRef idx="3">
-            <a:schemeClr val="accent1"/>
-          </a:fillRef>
-          <a:effectRef idx="2">
-            <a:schemeClr val="accent1"/>
-          </a:effectRef>
-          <a:fontRef idx="minor">
-            <a:schemeClr val="lt1"/>
-          </a:fontRef>
-        </p:style>
-        <p:txBody>
-          <a:bodyPr rtlCol="0" anchor="ctr"/>
-          <a:lstStyle/>
-          <a:p>
-            <a:pPr algn="ctr"/>
-          </a:p>
-        </p:txBody>
-      </p:sp>
-      <p:sp>
-        <p:nvSpPr>
-          <p:cNvPr id="13" name="TextBox 12"/>
-          <p:cNvSpPr txBox="1"/>
-          <p:nvPr/>
-        </p:nvSpPr>
-        <p:spPr>
-          <a:xfrm>
-            <a:off x="8961120" y="2194560"/>
-            <a:ext cx="2240280" cy="3474720"/>
-          </a:xfrm>
-          <a:prstGeom prst="rect">
-            <a:avLst/>
-          </a:prstGeom>
-          <a:noFill/>
-        </p:spPr>
-        <p:txBody>
-          <a:bodyPr wrap="square">
-            <a:spAutoFit/>
-          </a:bodyPr>
-          <a:lstStyle/>
-          <a:p>
-            <a:pPr>
-              <a:defRPr sz="1300" b="1">
-                <a:solidFill>
-                  <a:srgbClr val="7C3AED"/>
-                </a:solidFill>
-              </a:defRPr>
-            </a:pPr>
-            <a:r>
-              <a:t>Step 4</a:t>
-            </a:r>
-          </a:p>
-          <a:p>
-            <a:pPr>
-              <a:spcBef>
-                <a:spcPts val="600"/>
-              </a:spcBef>
-              <a:defRPr sz="1600" b="1">
-                <a:solidFill>
-                  <a:srgbClr val="F8FAFC"/>
-                </a:solidFill>
-              </a:defRPr>
-            </a:pPr>
-            <a:r>
-              <a:t>Disclose Tools</a:t>
-            </a:r>
-          </a:p>
-          <a:p>
-            <a:pPr>
-              <a:spcBef>
-                <a:spcPts val="800"/>
-              </a:spcBef>
-              <a:defRPr sz="1200">
-                <a:solidFill>
-                  <a:srgbClr val="94A3B8"/>
-                </a:solidFill>
-              </a:defRPr>
-            </a:pPr>
-            <a:r>
-              <a:t>Transparently declare tool usage in manuscript methodologies.</a:t>
-            </a:r>
-          </a:p>
-        </p:txBody>
-      </p:sp>
-    </p:spTree>
-  </p:cSld>
-  <p:clrMapOvr>
-    <a:masterClrMapping/>
-  </p:clrMapOvr>
-  <p:transition spd="med">
-    <p:fade/>
-  </p:transition>
+  <mc:AlternateContent xmlns:mc="http://schemas.openxmlformats.org/markup-compatibility/2006">
+    <mc:Choice xmlns:p159="http://schemas.microsoft.com/office/powerpoint/2015/09/main" Requires="p159">
+      <p:transition spd="slow" p14:dur="1500">
+        <p159:morph option="byObject"/>
+      </p:transition>
+    </mc:Choice>
+    <mc:Fallback>
+      <p:transition spd="slow">
+        <p:fade/>
+      </p:transition>
+    </mc:Fallback>
+  </mc:AlternateContent>
 </p:sld>
 </file>
 
